--- a/docs/deck.pptx
+++ b/docs/deck.pptx
@@ -16,8 +16,6 @@
     <p:sldId id="264" r:id="rId16"/>
     <p:sldId id="265" r:id="rId17"/>
     <p:sldId id="266" r:id="rId18"/>
-    <p:sldId id="267" r:id="rId19"/>
-    <p:sldId id="268" r:id="rId20"/>
   </p:sldIdLst>
   <p:sldSz cx="12191695" cy="6858000" type="screen4x3"/>
   <p:notesSz cx="6858000" cy="9144000"/>
@@ -514,7 +512,7 @@
           <a:lstStyle/>
           <a:p>
             <a:r>
-              <a:t>Twenty seconds. Say what it is before saying why it should exist.</a:t>
+              <a:t>20 s. Say what it is before saying why it should exist.</a:t>
             </a:r>
           </a:p>
           <a:p/>
@@ -600,23 +598,12 @@
           <a:lstStyle/>
           <a:p>
             <a:r>
-              <a:t>This slide answers judging criterion 1 directly. If you have ten seconds spare,</a:t>
-            </a:r>
-          </a:p>
-          <a:p>
-            <a:r>
-              <a:t>add the line that shows the discipline is real rather than claimed:</a:t>
-            </a:r>
-          </a:p>
-          <a:p/>
-          <a:p>
-            <a:r>
-              <a:t>"The English translation is the one thing on the page a model wrote and nothing</a:t>
-            </a:r>
-          </a:p>
-          <a:p>
-            <a:r>
-              <a:t>verified — so it is the one thing that decides nothing."</a:t>
+              <a:t>15 s. First slide to cut if you are over time — it is in the Devpost text and in</a:t>
+            </a:r>
+          </a:p>
+          <a:p>
+            <a:r>
+              <a:t>the repository.</a:t>
             </a:r>
           </a:p>
         </p:txBody>
@@ -686,162 +673,12 @@
           <a:lstStyle/>
           <a:p>
             <a:r>
-              <a:t>Twenty seconds. Saying plainly what it does not do reads as confidence, not as</a:t>
-            </a:r>
-          </a:p>
-          <a:p>
-            <a:r>
-              <a:t>a caveat. Do not soften it.</a:t>
-            </a:r>
-          </a:p>
-        </p:txBody>
-      </p:sp>
-      <p:sp>
-        <p:nvSpPr>
-          <p:cNvPr id="4" name="Slide Number Placeholder 3"/>
-          <p:cNvSpPr>
-            <a:spLocks noGrp="1"/>
-          </p:cNvSpPr>
-          <p:nvPr>
-            <p:ph type="sldNum" idx="5" sz="quarter"/>
-          </p:nvPr>
-        </p:nvSpPr>
-        <p:spPr/>
-      </p:sp>
-    </p:spTree>
-  </p:cSld>
-  <p:clrMapOvr>
-    <a:masterClrMapping/>
-  </p:clrMapOvr>
-</p:notes>
-</file>
-
-<file path=ppt/notesSlides/notesSlide12.xml><?xml version="1.0" encoding="utf-8"?>
-<p:notes xmlns:a="http://schemas.openxmlformats.org/drawingml/2006/main" xmlns:p="http://schemas.openxmlformats.org/presentationml/2006/main" xmlns:r="http://schemas.openxmlformats.org/officeDocument/2006/relationships">
-  <p:cSld>
-    <p:spTree>
-      <p:nvGrpSpPr>
-        <p:cNvPr id="1" name=""/>
-        <p:cNvGrpSpPr/>
-        <p:nvPr/>
-      </p:nvGrpSpPr>
-      <p:grpSpPr>
-        <a:xfrm>
-          <a:off x="0" y="0"/>
-          <a:ext cx="0" cy="0"/>
-          <a:chOff x="0" y="0"/>
-          <a:chExt cx="0" cy="0"/>
-        </a:xfrm>
-      </p:grpSpPr>
-      <p:sp>
-        <p:nvSpPr>
-          <p:cNvPr id="2" name="Slide Image Placeholder 1"/>
-          <p:cNvSpPr>
-            <a:spLocks noGrp="1"/>
-          </p:cNvSpPr>
-          <p:nvPr>
-            <p:ph type="sldImg" idx="2"/>
-          </p:nvPr>
-        </p:nvSpPr>
-        <p:spPr/>
-      </p:sp>
-      <p:sp>
-        <p:nvSpPr>
-          <p:cNvPr id="3" name="Notes Placeholder 2"/>
-          <p:cNvSpPr>
-            <a:spLocks noGrp="1"/>
-          </p:cNvSpPr>
-          <p:nvPr>
-            <p:ph type="body" idx="3" sz="quarter"/>
-          </p:nvPr>
-        </p:nvSpPr>
-        <p:spPr/>
-        <p:txBody>
-          <a:bodyPr/>
-          <a:lstStyle/>
-          <a:p>
-            <a:r>
-              <a:t>Fifteen seconds. This is the first slide to cut if you are over time — it is in</a:t>
-            </a:r>
-          </a:p>
-          <a:p>
-            <a:r>
-              <a:t>the Devpost text and in the repository.</a:t>
-            </a:r>
-          </a:p>
-        </p:txBody>
-      </p:sp>
-      <p:sp>
-        <p:nvSpPr>
-          <p:cNvPr id="4" name="Slide Number Placeholder 3"/>
-          <p:cNvSpPr>
-            <a:spLocks noGrp="1"/>
-          </p:cNvSpPr>
-          <p:nvPr>
-            <p:ph type="sldNum" idx="5" sz="quarter"/>
-          </p:nvPr>
-        </p:nvSpPr>
-        <p:spPr/>
-      </p:sp>
-    </p:spTree>
-  </p:cSld>
-  <p:clrMapOvr>
-    <a:masterClrMapping/>
-  </p:clrMapOvr>
-</p:notes>
-</file>
-
-<file path=ppt/notesSlides/notesSlide13.xml><?xml version="1.0" encoding="utf-8"?>
-<p:notes xmlns:a="http://schemas.openxmlformats.org/drawingml/2006/main" xmlns:p="http://schemas.openxmlformats.org/presentationml/2006/main" xmlns:r="http://schemas.openxmlformats.org/officeDocument/2006/relationships">
-  <p:cSld>
-    <p:spTree>
-      <p:nvGrpSpPr>
-        <p:cNvPr id="1" name=""/>
-        <p:cNvGrpSpPr/>
-        <p:nvPr/>
-      </p:nvGrpSpPr>
-      <p:grpSpPr>
-        <a:xfrm>
-          <a:off x="0" y="0"/>
-          <a:ext cx="0" cy="0"/>
-          <a:chOff x="0" y="0"/>
-          <a:chExt cx="0" cy="0"/>
-        </a:xfrm>
-      </p:grpSpPr>
-      <p:sp>
-        <p:nvSpPr>
-          <p:cNvPr id="2" name="Slide Image Placeholder 1"/>
-          <p:cNvSpPr>
-            <a:spLocks noGrp="1"/>
-          </p:cNvSpPr>
-          <p:nvPr>
-            <p:ph type="sldImg" idx="2"/>
-          </p:nvPr>
-        </p:nvSpPr>
-        <p:spPr/>
-      </p:sp>
-      <p:sp>
-        <p:nvSpPr>
-          <p:cNvPr id="3" name="Notes Placeholder 2"/>
-          <p:cNvSpPr>
-            <a:spLocks noGrp="1"/>
-          </p:cNvSpPr>
-          <p:nvPr>
-            <p:ph type="body" idx="3" sz="quarter"/>
-          </p:nvPr>
-        </p:nvSpPr>
-        <p:spPr/>
-        <p:txBody>
-          <a:bodyPr/>
-          <a:lstStyle/>
-          <a:p>
-            <a:r>
-              <a:t>Ten seconds. Leave the URL on screen for a beat after you stop talking, then</a:t>
-            </a:r>
-          </a:p>
-          <a:p>
-            <a:r>
-              <a:t>end. Do not add a thank-you slide.</a:t>
+              <a:t>10 s. Leave the URL on screen for a beat after you stop talking, then end. No</a:t>
+            </a:r>
+          </a:p>
+          <a:p>
+            <a:r>
+              <a:t>thank-you slide.</a:t>
             </a:r>
           </a:p>
         </p:txBody>
@@ -911,12 +748,12 @@
           <a:lstStyle/>
           <a:p>
             <a:r>
-              <a:t>Thirty-five seconds. The quotation is the strongest thing on the slide because</a:t>
-            </a:r>
-          </a:p>
-          <a:p>
-            <a:r>
-              <a:t>it is not your claim — it is the buyer's own wording, in the file itself.</a:t>
+              <a:t>35 s. The quotation is the strongest thing on the slide because it is not your</a:t>
+            </a:r>
+          </a:p>
+          <a:p>
+            <a:r>
+              <a:t>claim — it is the buyer's own wording, in the file itself.</a:t>
             </a:r>
           </a:p>
         </p:txBody>
@@ -986,12 +823,12 @@
           <a:lstStyle/>
           <a:p>
             <a:r>
-              <a:t>Twenty seconds. Say the rule slowly. It is the thesis of the whole submission</a:t>
-            </a:r>
-          </a:p>
-          <a:p>
-            <a:r>
-              <a:t>and every later beat exists to prove it.</a:t>
+              <a:t>20 s. Say the rule slowly. It is the thesis of the whole submission, and every</a:t>
+            </a:r>
+          </a:p>
+          <a:p>
+            <a:r>
+              <a:t>later beat exists to prove it.</a:t>
             </a:r>
           </a:p>
         </p:txBody>
@@ -1061,12 +898,12 @@
           <a:lstStyle/>
           <a:p>
             <a:r>
-              <a:t>Twenty seconds. Do not read the table aloud line by line — it reads itself.</a:t>
-            </a:r>
-          </a:p>
-          <a:p>
-            <a:r>
-              <a:t>Spend the words on the two piles, which is the part nobody expects.</a:t>
+              <a:t>20 s. Do not read the table aloud — it reads itself. Spend the words on the two</a:t>
+            </a:r>
+          </a:p>
+          <a:p>
+            <a:r>
+              <a:t>piles, which is the part nobody expects.</a:t>
             </a:r>
           </a:p>
         </p:txBody>
@@ -1136,12 +973,12 @@
           <a:lstStyle/>
           <a:p>
             <a:r>
-              <a:t>Twenty-five seconds. The last sentence buys more credibility than anything else</a:t>
-            </a:r>
-          </a:p>
-          <a:p>
-            <a:r>
-              <a:t>in the video. Say it, and do not hurry it.</a:t>
+              <a:t>25 s. The last sentence buys more credibility than anything else in the video.</a:t>
+            </a:r>
+          </a:p>
+          <a:p>
+            <a:r>
+              <a:t>Say it, and do not hurry it.</a:t>
             </a:r>
           </a:p>
         </p:txBody>
@@ -1211,23 +1048,33 @@
           <a:lstStyle/>
           <a:p>
             <a:r>
-              <a:t>python -X utf8 -m tender_compliance samples/real_dce/rc_2026SDCRH05.pdf \</a:t>
-            </a:r>
-          </a:p>
-          <a:p>
-            <a:r>
-              <a:t>    --pages 5-6 --today 2026-08-23 --html out/dgac.html</a:t>
+              <a:t>65 s of screen recording, two runs. `python demo/walkthrough.py` drives both.</a:t>
             </a:r>
           </a:p>
           <a:p/>
           <a:p>
             <a:r>
-              <a:t>Talk over the run. Then open out/dgac.html, stop talking, and let them read the</a:t>
-            </a:r>
-          </a:p>
-          <a:p>
-            <a:r>
-              <a:t>'-9 d' row. Then one sentence: the requirement stays French because the tender</a:t>
+              <a:t>RUN 1 — DGAC, French, 17 s:</a:t>
+            </a:r>
+          </a:p>
+          <a:p>
+            <a:r>
+              <a:t>  python -X utf8 -m tender_compliance samples/real_dce/rc_2026SDCRH05.pdf</a:t>
+            </a:r>
+          </a:p>
+          <a:p>
+            <a:r>
+              <a:t>      --pages 5-6 --today 2026-08-23 --html out/dgac.html</a:t>
+            </a:r>
+          </a:p>
+          <a:p>
+            <a:r>
+              <a:t>Talk over it. Then open out/dgac.html, stop talking, and let them read the</a:t>
+            </a:r>
+          </a:p>
+          <a:p>
+            <a:r>
+              <a:t>'-9 d' row. One sentence after: the requirement stays French because the tender</a:t>
             </a:r>
           </a:p>
           <a:p>
@@ -1238,6 +1085,37 @@
           <a:p>
             <a:r>
               <a:t>English sits beside it, never instead of it.</a:t>
+            </a:r>
+          </a:p>
+          <a:p/>
+          <a:p>
+            <a:r>
+              <a:t>RUN 2 — European Parliament, English, 35 s:</a:t>
+            </a:r>
+          </a:p>
+          <a:p>
+            <a:r>
+              <a:t>  python -X utf8 -m tender_compliance samples/real_dce/itt_EP_COMM_2026.pdf</a:t>
+            </a:r>
+          </a:p>
+          <a:p>
+            <a:r>
+              <a:t>      --today 2026-08-23</a:t>
+            </a:r>
+          </a:p>
+          <a:p>
+            <a:r>
+              <a:t>READ THE BANNER OFF THE SCREEN; the count moves on every run (39 requirements,</a:t>
+            </a:r>
+          </a:p>
+          <a:p>
+            <a:r>
+              <a:t>8 covered, 31 fatal on 2026-09-04). Then point at what is NOT there: no</a:t>
+            </a:r>
+          </a:p>
+          <a:p>
+            <a:r>
+              <a:t>translation lines anywhere. The tool worked out that this document needs none.</a:t>
             </a:r>
           </a:p>
         </p:txBody>
@@ -1307,33 +1185,12 @@
           <a:lstStyle/>
           <a:p>
             <a:r>
-              <a:t>python -X utf8 -m tender_compliance samples/real_dce/itt_EP_COMM_2026.pdf \</a:t>
-            </a:r>
-          </a:p>
-          <a:p>
-            <a:r>
-              <a:t>    --today 2026-08-23</a:t>
-            </a:r>
-          </a:p>
-          <a:p/>
-          <a:p>
-            <a:r>
-              <a:t>35 s on 2026-09-04, which gave 39 requirements, 8 covered, 31 fatal. READ THE</a:t>
-            </a:r>
-          </a:p>
-          <a:p>
-            <a:r>
-              <a:t>BANNER OFF THE SCREEN — the count moves on every run. Then point at what is NOT</a:t>
-            </a:r>
-          </a:p>
-          <a:p>
-            <a:r>
-              <a:t>there: no translation lines anywhere. The tool worked out that this document</a:t>
-            </a:r>
-          </a:p>
-          <a:p>
-            <a:r>
-              <a:t>does not need any.</a:t>
+              <a:t>25 s. If ANTAI is not in your take, drop its line and keep the other two. The</a:t>
+            </a:r>
+          </a:p>
+          <a:p>
+            <a:r>
+              <a:t>EFSA one is the most surprising and the cheapest to say.</a:t>
             </a:r>
           </a:p>
         </p:txBody>
@@ -1403,12 +1260,49 @@
           <a:lstStyle/>
           <a:p>
             <a:r>
-              <a:t>Twenty-five seconds. If ANTAI is not in your take, drop its line and keep the</a:t>
-            </a:r>
-          </a:p>
-          <a:p>
-            <a:r>
-              <a:t>other two. The EFSA one is the most surprising and the cheapest to say.</a:t>
+              <a:t>35 s, over the diagram. This slide answers judging criterion 1.</a:t>
+            </a:r>
+          </a:p>
+          <a:p/>
+          <a:p>
+            <a:r>
+              <a:t>"Two bands. The model proposes on top, twice — the obligations in the text, then</a:t>
+            </a:r>
+          </a:p>
+          <a:p>
+            <a:r>
+              <a:t>which document might answer each one. It decides nothing. Everything below is</a:t>
+            </a:r>
+          </a:p>
+          <a:p>
+            <a:r>
+              <a:t>deterministic. A quote that is not on the page it cites is rejected, with a</a:t>
+            </a:r>
+          </a:p>
+          <a:p>
+            <a:r>
+              <a:t>reason. A document that is not in the library, verbatim, is not a match. Dates</a:t>
+            </a:r>
+          </a:p>
+          <a:p>
+            <a:r>
+              <a:t>and thresholds are arithmetic and never reach the model at all."</a:t>
+            </a:r>
+          </a:p>
+          <a:p/>
+          <a:p>
+            <a:r>
+              <a:t>Then the tools, off the strip at the bottom. If ten seconds are spare: "the</a:t>
+            </a:r>
+          </a:p>
+          <a:p>
+            <a:r>
+              <a:t>English translation is the one thing on the page a model wrote and nothing</a:t>
+            </a:r>
+          </a:p>
+          <a:p>
+            <a:r>
+              <a:t>verified — so it is the one thing that decides nothing."</a:t>
             </a:r>
           </a:p>
         </p:txBody>
@@ -1478,33 +1372,12 @@
           <a:lstStyle/>
           <a:p>
             <a:r>
-              <a:t>Thirty-five seconds, over the diagram.</a:t>
-            </a:r>
-          </a:p>
-          <a:p/>
-          <a:p>
-            <a:r>
-              <a:t>"Two bands. The model proposes on top, twice — the obligations in the text, then</a:t>
-            </a:r>
-          </a:p>
-          <a:p>
-            <a:r>
-              <a:t>which document might answer each one. It decides nothing. Everything below is</a:t>
-            </a:r>
-          </a:p>
-          <a:p>
-            <a:r>
-              <a:t>deterministic. A quote that is not on the page it cites is rejected, with a</a:t>
-            </a:r>
-          </a:p>
-          <a:p>
-            <a:r>
-              <a:t>reason. A document that is not in the library, verbatim, is not a match. Dates</a:t>
-            </a:r>
-          </a:p>
-          <a:p>
-            <a:r>
-              <a:t>and thresholds are arithmetic and never reach the model at all."</a:t>
+              <a:t>20 s. Saying plainly what it does not do reads as confidence, not as a caveat.</a:t>
+            </a:r>
+          </a:p>
+          <a:p>
+            <a:r>
+              <a:t>Do not soften it.</a:t>
             </a:r>
           </a:p>
         </p:txBody>
@@ -4791,405 +4664,27 @@
                 </a:solidFill>
                 <a:latin typeface="Segoe UI"/>
               </a:rPr>
-              <a:t>Built with the Strands Agents SDK</a:t>
-            </a:r>
-          </a:p>
-        </p:txBody>
-      </p:sp>
-      <p:sp>
-        <p:nvSpPr>
-          <p:cNvPr id="4" name="TextBox 3"/>
-          <p:cNvSpPr txBox="1"/>
-          <p:nvPr/>
-        </p:nvSpPr>
-        <p:spPr>
-          <a:xfrm>
-            <a:off x="868680" y="2103120"/>
-            <a:ext cx="10424160" cy="1280160"/>
-          </a:xfrm>
-          <a:prstGeom prst="rect">
-            <a:avLst/>
-          </a:prstGeom>
-          <a:noFill/>
-        </p:spPr>
-        <p:txBody>
-          <a:bodyPr wrap="square" lIns="0" rIns="0" tIns="0" bIns="0">
-            <a:spAutoFit/>
-          </a:bodyPr>
-          <a:lstStyle/>
-          <a:p>
-            <a:pPr algn="l">
-              <a:lnSpc>
-                <a:spcPct val="115000"/>
-              </a:lnSpc>
-              <a:spcAft>
-                <a:spcPts val="1400"/>
-              </a:spcAft>
-            </a:pPr>
-            <a:r>
-              <a:rPr sz="1700" b="0">
-                <a:solidFill>
-                  <a:srgbClr val="14203A"/>
-                </a:solidFill>
-                <a:latin typeface="Segoe UI"/>
-              </a:rPr>
-              <a:t>Two agents, and four tools they are given:</a:t>
-            </a:r>
-          </a:p>
-        </p:txBody>
-      </p:sp>
-      <p:sp>
-        <p:nvSpPr>
-          <p:cNvPr id="5" name="TextBox 4"/>
-          <p:cNvSpPr txBox="1"/>
-          <p:nvPr/>
-        </p:nvSpPr>
-        <p:spPr>
-          <a:xfrm>
-            <a:off x="1097280" y="2788920"/>
-            <a:ext cx="3931920" cy="365760"/>
-          </a:xfrm>
-          <a:prstGeom prst="rect">
-            <a:avLst/>
-          </a:prstGeom>
-          <a:noFill/>
-        </p:spPr>
-        <p:txBody>
-          <a:bodyPr wrap="square" lIns="0" rIns="0" tIns="0" bIns="0">
-            <a:spAutoFit/>
-          </a:bodyPr>
-          <a:lstStyle/>
-          <a:p>
-            <a:pPr algn="l">
-              <a:lnSpc>
-                <a:spcPct val="115000"/>
-              </a:lnSpc>
-              <a:spcAft>
-                <a:spcPts val="0"/>
-              </a:spcAft>
-            </a:pPr>
-            <a:r>
-              <a:rPr sz="1400" b="1">
-                <a:solidFill>
-                  <a:srgbClr val="14203A"/>
-                </a:solidFill>
-                <a:latin typeface="Consolas"/>
-              </a:rPr>
-              <a:t>@tool  page_text</a:t>
-            </a:r>
-          </a:p>
-        </p:txBody>
-      </p:sp>
-      <p:sp>
-        <p:nvSpPr>
-          <p:cNvPr id="6" name="TextBox 5"/>
-          <p:cNvSpPr txBox="1"/>
-          <p:nvPr/>
-        </p:nvSpPr>
-        <p:spPr>
-          <a:xfrm>
-            <a:off x="5349240" y="2807208"/>
-            <a:ext cx="5852160" cy="365760"/>
-          </a:xfrm>
-          <a:prstGeom prst="rect">
-            <a:avLst/>
-          </a:prstGeom>
-          <a:noFill/>
-        </p:spPr>
-        <p:txBody>
-          <a:bodyPr wrap="square" lIns="0" rIns="0" tIns="0" bIns="0">
-            <a:spAutoFit/>
-          </a:bodyPr>
-          <a:lstStyle/>
-          <a:p>
-            <a:pPr algn="l">
-              <a:lnSpc>
-                <a:spcPct val="115000"/>
-              </a:lnSpc>
-              <a:spcAft>
-                <a:spcPts val="0"/>
-              </a:spcAft>
-            </a:pPr>
-            <a:r>
-              <a:rPr sz="1350" b="0">
-                <a:solidFill>
-                  <a:srgbClr val="5B6880"/>
-                </a:solidFill>
-                <a:latin typeface="Segoe UI"/>
-              </a:rPr>
-              <a:t>read a page of the tender</a:t>
-            </a:r>
-          </a:p>
-        </p:txBody>
-      </p:sp>
-      <p:sp>
-        <p:nvSpPr>
-          <p:cNvPr id="7" name="TextBox 6"/>
-          <p:cNvSpPr txBox="1"/>
-          <p:nvPr/>
-        </p:nvSpPr>
-        <p:spPr>
-          <a:xfrm>
-            <a:off x="1097280" y="3264408"/>
-            <a:ext cx="3931920" cy="365760"/>
-          </a:xfrm>
-          <a:prstGeom prst="rect">
-            <a:avLst/>
-          </a:prstGeom>
-          <a:noFill/>
-        </p:spPr>
-        <p:txBody>
-          <a:bodyPr wrap="square" lIns="0" rIns="0" tIns="0" bIns="0">
-            <a:spAutoFit/>
-          </a:bodyPr>
-          <a:lstStyle/>
-          <a:p>
-            <a:pPr algn="l">
-              <a:lnSpc>
-                <a:spcPct val="115000"/>
-              </a:lnSpc>
-              <a:spcAft>
-                <a:spcPts val="0"/>
-              </a:spcAft>
-            </a:pPr>
-            <a:r>
-              <a:rPr sz="1400" b="1">
-                <a:solidFill>
-                  <a:srgbClr val="14203A"/>
-                </a:solidFill>
-                <a:latin typeface="Consolas"/>
-              </a:rPr>
-              <a:t>@tool  quote_is_on_page</a:t>
-            </a:r>
-          </a:p>
-        </p:txBody>
-      </p:sp>
-      <p:sp>
-        <p:nvSpPr>
-          <p:cNvPr id="8" name="TextBox 7"/>
-          <p:cNvSpPr txBox="1"/>
-          <p:nvPr/>
-        </p:nvSpPr>
-        <p:spPr>
-          <a:xfrm>
-            <a:off x="5349240" y="3282696"/>
-            <a:ext cx="5852160" cy="365760"/>
-          </a:xfrm>
-          <a:prstGeom prst="rect">
-            <a:avLst/>
-          </a:prstGeom>
-          <a:noFill/>
-        </p:spPr>
-        <p:txBody>
-          <a:bodyPr wrap="square" lIns="0" rIns="0" tIns="0" bIns="0">
-            <a:spAutoFit/>
-          </a:bodyPr>
-          <a:lstStyle/>
-          <a:p>
-            <a:pPr algn="l">
-              <a:lnSpc>
-                <a:spcPct val="115000"/>
-              </a:lnSpc>
-              <a:spcAft>
-                <a:spcPts val="0"/>
-              </a:spcAft>
-            </a:pPr>
-            <a:r>
-              <a:rPr sz="1350" b="0">
-                <a:solidFill>
-                  <a:srgbClr val="5B6880"/>
-                </a:solidFill>
-                <a:latin typeface="Segoe UI"/>
-              </a:rPr>
-              <a:t>check a wording really appears on it</a:t>
-            </a:r>
-          </a:p>
-        </p:txBody>
-      </p:sp>
-      <p:sp>
-        <p:nvSpPr>
-          <p:cNvPr id="9" name="TextBox 8"/>
-          <p:cNvSpPr txBox="1"/>
-          <p:nvPr/>
-        </p:nvSpPr>
-        <p:spPr>
-          <a:xfrm>
-            <a:off x="1097280" y="3739896"/>
-            <a:ext cx="3931920" cy="365760"/>
-          </a:xfrm>
-          <a:prstGeom prst="rect">
-            <a:avLst/>
-          </a:prstGeom>
-          <a:noFill/>
-        </p:spPr>
-        <p:txBody>
-          <a:bodyPr wrap="square" lIns="0" rIns="0" tIns="0" bIns="0">
-            <a:spAutoFit/>
-          </a:bodyPr>
-          <a:lstStyle/>
-          <a:p>
-            <a:pPr algn="l">
-              <a:lnSpc>
-                <a:spcPct val="115000"/>
-              </a:lnSpc>
-              <a:spcAft>
-                <a:spcPts val="0"/>
-              </a:spcAft>
-            </a:pPr>
-            <a:r>
-              <a:rPr sz="1400" b="1">
-                <a:solidFill>
-                  <a:srgbClr val="14203A"/>
-                </a:solidFill>
-                <a:latin typeface="Consolas"/>
-              </a:rPr>
-              <a:t>@tool  list_documents</a:t>
-            </a:r>
-          </a:p>
-        </p:txBody>
-      </p:sp>
-      <p:sp>
-        <p:nvSpPr>
-          <p:cNvPr id="10" name="TextBox 9"/>
-          <p:cNvSpPr txBox="1"/>
-          <p:nvPr/>
-        </p:nvSpPr>
-        <p:spPr>
-          <a:xfrm>
-            <a:off x="5349240" y="3758183"/>
-            <a:ext cx="5852160" cy="365760"/>
-          </a:xfrm>
-          <a:prstGeom prst="rect">
-            <a:avLst/>
-          </a:prstGeom>
-          <a:noFill/>
-        </p:spPr>
-        <p:txBody>
-          <a:bodyPr wrap="square" lIns="0" rIns="0" tIns="0" bIns="0">
-            <a:spAutoFit/>
-          </a:bodyPr>
-          <a:lstStyle/>
-          <a:p>
-            <a:pPr algn="l">
-              <a:lnSpc>
-                <a:spcPct val="115000"/>
-              </a:lnSpc>
-              <a:spcAft>
-                <a:spcPts val="0"/>
-              </a:spcAft>
-            </a:pPr>
-            <a:r>
-              <a:rPr sz="1350" b="0">
-                <a:solidFill>
-                  <a:srgbClr val="5B6880"/>
-                </a:solidFill>
-                <a:latin typeface="Segoe UI"/>
-              </a:rPr>
-              <a:t>list the evidence library</a:t>
-            </a:r>
-          </a:p>
-        </p:txBody>
-      </p:sp>
-      <p:sp>
-        <p:nvSpPr>
-          <p:cNvPr id="11" name="TextBox 10"/>
-          <p:cNvSpPr txBox="1"/>
-          <p:nvPr/>
-        </p:nvSpPr>
-        <p:spPr>
-          <a:xfrm>
-            <a:off x="1097280" y="4215383"/>
-            <a:ext cx="3931920" cy="365760"/>
-          </a:xfrm>
-          <a:prstGeom prst="rect">
-            <a:avLst/>
-          </a:prstGeom>
-          <a:noFill/>
-        </p:spPr>
-        <p:txBody>
-          <a:bodyPr wrap="square" lIns="0" rIns="0" tIns="0" bIns="0">
-            <a:spAutoFit/>
-          </a:bodyPr>
-          <a:lstStyle/>
-          <a:p>
-            <a:pPr algn="l">
-              <a:lnSpc>
-                <a:spcPct val="115000"/>
-              </a:lnSpc>
-              <a:spcAft>
-                <a:spcPts val="0"/>
-              </a:spcAft>
-            </a:pPr>
-            <a:r>
-              <a:rPr sz="1400" b="1">
-                <a:solidFill>
-                  <a:srgbClr val="14203A"/>
-                </a:solidFill>
-                <a:latin typeface="Consolas"/>
-              </a:rPr>
-              <a:t>@tool  document_is_in_library</a:t>
-            </a:r>
-          </a:p>
-        </p:txBody>
-      </p:sp>
-      <p:sp>
-        <p:nvSpPr>
-          <p:cNvPr id="12" name="TextBox 11"/>
-          <p:cNvSpPr txBox="1"/>
-          <p:nvPr/>
-        </p:nvSpPr>
-        <p:spPr>
-          <a:xfrm>
-            <a:off x="5349240" y="4233671"/>
-            <a:ext cx="5852160" cy="365760"/>
-          </a:xfrm>
-          <a:prstGeom prst="rect">
-            <a:avLst/>
-          </a:prstGeom>
-          <a:noFill/>
-        </p:spPr>
-        <p:txBody>
-          <a:bodyPr wrap="square" lIns="0" rIns="0" tIns="0" bIns="0">
-            <a:spAutoFit/>
-          </a:bodyPr>
-          <a:lstStyle/>
-          <a:p>
-            <a:pPr algn="l">
-              <a:lnSpc>
-                <a:spcPct val="115000"/>
-              </a:lnSpc>
-              <a:spcAft>
-                <a:spcPts val="0"/>
-              </a:spcAft>
-            </a:pPr>
-            <a:r>
-              <a:rPr sz="1350" b="0">
-                <a:solidFill>
-                  <a:srgbClr val="5B6880"/>
-                </a:solidFill>
-                <a:latin typeface="Segoe UI"/>
-              </a:rPr>
-              <a:t>check a name is in it</a:t>
-            </a:r>
-          </a:p>
-        </p:txBody>
-      </p:sp>
-      <p:sp>
-        <p:nvSpPr>
-          <p:cNvPr id="13" name="Rectangle 12"/>
+              <a:t>Recorded, and deliberately not built</a:t>
+            </a:r>
+          </a:p>
+        </p:txBody>
+      </p:sp>
+      <p:sp>
+        <p:nvSpPr>
+          <p:cNvPr id="4" name="Oval 3"/>
           <p:cNvSpPr/>
           <p:nvPr/>
         </p:nvSpPr>
         <p:spPr>
           <a:xfrm>
-            <a:off x="868680" y="4663440"/>
-            <a:ext cx="10454335" cy="1600200"/>
-          </a:xfrm>
-          <a:prstGeom prst="rect">
+            <a:off x="868680" y="2496312"/>
+            <a:ext cx="91440" cy="91440"/>
+          </a:xfrm>
+          <a:prstGeom prst="ellipse">
             <a:avLst/>
           </a:prstGeom>
           <a:solidFill>
-            <a:srgbClr val="14203A"/>
+            <a:srgbClr val="A8243B"/>
           </a:solidFill>
           <a:ln>
             <a:noFill/>
@@ -5220,14 +4715,14 @@
       </p:sp>
       <p:sp>
         <p:nvSpPr>
-          <p:cNvPr id="14" name="TextBox 13"/>
+          <p:cNvPr id="5" name="TextBox 4"/>
           <p:cNvSpPr txBox="1"/>
           <p:nvPr/>
         </p:nvSpPr>
         <p:spPr>
           <a:xfrm>
-            <a:off x="1325880" y="4956048"/>
-            <a:ext cx="9539935" cy="1097280"/>
+            <a:off x="1252728" y="2331720"/>
+            <a:ext cx="9966960" cy="1005840"/>
           </a:xfrm>
           <a:prstGeom prst="rect">
             <a:avLst/>
@@ -5242,81 +4737,36 @@
           <a:p>
             <a:pPr algn="l">
               <a:lnSpc>
-                <a:spcPct val="135000"/>
-              </a:lnSpc>
-              <a:spcAft>
-                <a:spcPts val="1000"/>
-              </a:spcAft>
-            </a:pPr>
-            <a:r>
-              <a:rPr sz="1550" b="0">
-                <a:solidFill>
-                  <a:srgbClr val="C9D6E8"/>
-                </a:solidFill>
-                <a:latin typeface="Segoe UI"/>
-              </a:rPr>
-              <a:t>They are the same checks that run afterwards — so the agent can correct a citation before it commits to one.</a:t>
-            </a:r>
-          </a:p>
-          <a:p>
-            <a:pPr algn="l">
-              <a:lnSpc>
-                <a:spcPct val="135000"/>
+                <a:spcPct val="140000"/>
               </a:lnSpc>
               <a:spcAft>
                 <a:spcPts val="0"/>
               </a:spcAft>
             </a:pPr>
             <a:r>
-              <a:rPr sz="1550" b="1">
-                <a:solidFill>
-                  <a:srgbClr val="FFFFFF"/>
+              <a:rPr sz="1600" b="0">
+                <a:solidFill>
+                  <a:srgbClr val="14203A"/>
                 </a:solidFill>
                 <a:latin typeface="Segoe UI"/>
               </a:rPr>
-              <a:t>But it cannot skip them: a tool it never calls changes nothing, because the verification runs either way.</a:t>
-            </a:r>
-          </a:p>
-        </p:txBody>
-      </p:sp>
-    </p:spTree>
-  </p:cSld>
-  <p:clrMapOvr>
-    <a:masterClrMapping/>
-  </p:clrMapOvr>
-</p:sld>
-</file>
-
-<file path=ppt/slides/slide11.xml><?xml version="1.0" encoding="utf-8"?>
-<p:sld xmlns:a="http://schemas.openxmlformats.org/drawingml/2006/main" xmlns:p="http://schemas.openxmlformats.org/presentationml/2006/main" xmlns:r="http://schemas.openxmlformats.org/officeDocument/2006/relationships">
-  <p:cSld>
-    <p:bg>
-      <p:bgPr>
-        <a:solidFill>
-          <a:srgbClr val="F6F8FB"/>
-        </a:solidFill>
-        <a:effectLst/>
-      </p:bgPr>
-    </p:bg>
-    <p:spTree>
-      <p:nvGrpSpPr>
-        <p:cNvPr id="1" name=""/>
-        <p:cNvGrpSpPr/>
-        <p:nvPr/>
-      </p:nvGrpSpPr>
-      <p:grpSpPr/>
-      <p:sp>
-        <p:nvSpPr>
-          <p:cNvPr id="2" name="Rectangle 1"/>
+              <a:t>One requirement with several satisfaction paths — matching the alternatives rather than only flagging them.</a:t>
+            </a:r>
+          </a:p>
+        </p:txBody>
+      </p:sp>
+      <p:sp>
+        <p:nvSpPr>
+          <p:cNvPr id="6" name="Oval 5"/>
           <p:cNvSpPr/>
           <p:nvPr/>
         </p:nvSpPr>
         <p:spPr>
           <a:xfrm>
-            <a:off x="868680" y="960120"/>
-            <a:ext cx="1051560" cy="50292"/>
-          </a:xfrm>
-          <a:prstGeom prst="rect">
+            <a:off x="868680" y="3502152"/>
+            <a:ext cx="91440" cy="91440"/>
+          </a:xfrm>
+          <a:prstGeom prst="ellipse">
             <a:avLst/>
           </a:prstGeom>
           <a:solidFill>
@@ -5351,14 +4801,14 @@
       </p:sp>
       <p:sp>
         <p:nvSpPr>
-          <p:cNvPr id="3" name="TextBox 2"/>
+          <p:cNvPr id="7" name="TextBox 6"/>
           <p:cNvSpPr txBox="1"/>
           <p:nvPr/>
         </p:nvSpPr>
         <p:spPr>
           <a:xfrm>
-            <a:off x="868680" y="1216152"/>
-            <a:ext cx="10454335" cy="914400"/>
+            <a:off x="1252728" y="3337560"/>
+            <a:ext cx="9966960" cy="1005840"/>
           </a:xfrm>
           <a:prstGeom prst="rect">
             <a:avLst/>
@@ -5373,97 +4823,36 @@
           <a:p>
             <a:pPr algn="l">
               <a:lnSpc>
-                <a:spcPct val="115000"/>
+                <a:spcPct val="140000"/>
               </a:lnSpc>
               <a:spcAft>
                 <a:spcPts val="0"/>
               </a:spcAft>
             </a:pPr>
             <a:r>
-              <a:rPr sz="3400" b="1">
+              <a:rPr sz="1600" b="0">
                 <a:solidFill>
                   <a:srgbClr val="14203A"/>
                 </a:solidFill>
                 <a:latin typeface="Segoe UI"/>
               </a:rPr>
-              <a:t>Who it is for</a:t>
-            </a:r>
-          </a:p>
-        </p:txBody>
-      </p:sp>
-      <p:sp>
-        <p:nvSpPr>
-          <p:cNvPr id="4" name="TextBox 3"/>
-          <p:cNvSpPr txBox="1"/>
-          <p:nvPr/>
-        </p:nvSpPr>
-        <p:spPr>
-          <a:xfrm>
-            <a:off x="868680" y="2103120"/>
-            <a:ext cx="10424160" cy="2011680"/>
-          </a:xfrm>
-          <a:prstGeom prst="rect">
-            <a:avLst/>
-          </a:prstGeom>
-          <a:noFill/>
-        </p:spPr>
-        <p:txBody>
-          <a:bodyPr wrap="square" lIns="0" rIns="0" tIns="0" bIns="0">
-            <a:spAutoFit/>
-          </a:bodyPr>
-          <a:lstStyle/>
-          <a:p>
-            <a:pPr algn="l">
-              <a:lnSpc>
-                <a:spcPct val="135000"/>
-              </a:lnSpc>
-              <a:spcAft>
-                <a:spcPts val="1400"/>
-              </a:spcAft>
-            </a:pPr>
-            <a:r>
-              <a:rPr sz="2000" b="0">
-                <a:solidFill>
-                  <a:srgbClr val="14203A"/>
-                </a:solidFill>
-                <a:latin typeface="Segoe UI"/>
-              </a:rPr>
-              <a:t>The person assembling the bid: a small firm without a bid office, a subcontractor, a first-time bidder.</a:t>
-            </a:r>
-          </a:p>
-          <a:p>
-            <a:pPr algn="l">
-              <a:lnSpc>
-                <a:spcPct val="145000"/>
-              </a:lnSpc>
-              <a:spcAft>
-                <a:spcPts val="0"/>
-              </a:spcAft>
-            </a:pPr>
-            <a:r>
-              <a:rPr sz="1500" b="0">
-                <a:solidFill>
-                  <a:srgbClr val="5B6880"/>
-                </a:solidFill>
-                <a:latin typeface="Segoe UI"/>
-              </a:rPr>
-              <a:t>The buyer already has this checklist. The bidder does not. Getting it wrong costs a contract that was winnable on the merits — which is why the tool would rather say “check this” than say “covered”.</a:t>
-            </a:r>
-          </a:p>
-        </p:txBody>
-      </p:sp>
-      <p:sp>
-        <p:nvSpPr>
-          <p:cNvPr id="5" name="Rectangle 4"/>
+              <a:t>Requirements the buyer can obtain itself from an official register, legitimately absent from any folder.</a:t>
+            </a:r>
+          </a:p>
+        </p:txBody>
+      </p:sp>
+      <p:sp>
+        <p:nvSpPr>
+          <p:cNvPr id="8" name="Oval 7"/>
           <p:cNvSpPr/>
           <p:nvPr/>
         </p:nvSpPr>
         <p:spPr>
           <a:xfrm>
-            <a:off x="868680" y="4343400"/>
-            <a:ext cx="41148" cy="1371600"/>
-          </a:xfrm>
-          <a:prstGeom prst="rect">
+            <a:off x="868680" y="4507992"/>
+            <a:ext cx="91440" cy="91440"/>
+          </a:xfrm>
+          <a:prstGeom prst="ellipse">
             <a:avLst/>
           </a:prstGeom>
           <a:solidFill>
@@ -5498,14 +4887,14 @@
       </p:sp>
       <p:sp>
         <p:nvSpPr>
-          <p:cNvPr id="6" name="TextBox 5"/>
+          <p:cNvPr id="9" name="TextBox 8"/>
           <p:cNvSpPr txBox="1"/>
           <p:nvPr/>
         </p:nvSpPr>
         <p:spPr>
           <a:xfrm>
-            <a:off x="1280160" y="4434840"/>
-            <a:ext cx="9966960" cy="1280160"/>
+            <a:off x="1252728" y="4343400"/>
+            <a:ext cx="9966960" cy="1005840"/>
           </a:xfrm>
           <a:prstGeom prst="rect">
             <a:avLst/>
@@ -5520,39 +4909,62 @@
           <a:p>
             <a:pPr algn="l">
               <a:lnSpc>
-                <a:spcPct val="130000"/>
-              </a:lnSpc>
-              <a:spcAft>
-                <a:spcPts val="800"/>
-              </a:spcAft>
-            </a:pPr>
-            <a:r>
-              <a:rPr sz="1900" b="1">
-                <a:solidFill>
-                  <a:srgbClr val="14203A"/>
-                </a:solidFill>
-                <a:latin typeface="Segoe UI"/>
-              </a:rPr>
-              <a:t>It does not write your bid, and it does not tell you that you are compliant.</a:t>
-            </a:r>
-          </a:p>
-          <a:p>
-            <a:pPr algn="l">
-              <a:lnSpc>
-                <a:spcPct val="130000"/>
+                <a:spcPct val="140000"/>
               </a:lnSpc>
               <a:spcAft>
                 <a:spcPts val="0"/>
               </a:spcAft>
             </a:pPr>
             <a:r>
-              <a:rPr sz="1900" b="0">
+              <a:rPr sz="1600" b="0">
                 <a:solidFill>
                   <a:srgbClr val="14203A"/>
                 </a:solidFill>
                 <a:latin typeface="Segoe UI"/>
               </a:rPr>
-              <a:t>It finds the gaps and shows you where to look.</a:t>
+              <a:t>Groups of operators: the checklist multiplies per member while the capacity thresholds are assessed on the group as a whole.</a:t>
+            </a:r>
+          </a:p>
+        </p:txBody>
+      </p:sp>
+      <p:sp>
+        <p:nvSpPr>
+          <p:cNvPr id="10" name="TextBox 9"/>
+          <p:cNvSpPr txBox="1"/>
+          <p:nvPr/>
+        </p:nvSpPr>
+        <p:spPr>
+          <a:xfrm>
+            <a:off x="868680" y="5760720"/>
+            <a:ext cx="10454335" cy="914400"/>
+          </a:xfrm>
+          <a:prstGeom prst="rect">
+            <a:avLst/>
+          </a:prstGeom>
+          <a:noFill/>
+        </p:spPr>
+        <p:txBody>
+          <a:bodyPr wrap="square" lIns="0" rIns="0" tIns="0" bIns="0">
+            <a:spAutoFit/>
+          </a:bodyPr>
+          <a:lstStyle/>
+          <a:p>
+            <a:pPr algn="l">
+              <a:lnSpc>
+                <a:spcPct val="140000"/>
+              </a:lnSpc>
+              <a:spcAft>
+                <a:spcPts val="0"/>
+              </a:spcAft>
+            </a:pPr>
+            <a:r>
+              <a:rPr sz="1400" b="0">
+                <a:solidFill>
+                  <a:srgbClr val="5B6880"/>
+                </a:solidFill>
+                <a:latin typeface="Segoe UI"/>
+              </a:rPr>
+              <a:t>Each one is in samples/real_requirements.json with the sentence that revealed it. Not one was visible from the specification — they came out of reading real documents.</a:t>
             </a:r>
           </a:p>
         </p:txBody>
@@ -5565,419 +4977,7 @@
 </p:sld>
 </file>
 
-<file path=ppt/slides/slide12.xml><?xml version="1.0" encoding="utf-8"?>
-<p:sld xmlns:a="http://schemas.openxmlformats.org/drawingml/2006/main" xmlns:p="http://schemas.openxmlformats.org/presentationml/2006/main" xmlns:r="http://schemas.openxmlformats.org/officeDocument/2006/relationships">
-  <p:cSld>
-    <p:bg>
-      <p:bgPr>
-        <a:solidFill>
-          <a:srgbClr val="F6F8FB"/>
-        </a:solidFill>
-        <a:effectLst/>
-      </p:bgPr>
-    </p:bg>
-    <p:spTree>
-      <p:nvGrpSpPr>
-        <p:cNvPr id="1" name=""/>
-        <p:cNvGrpSpPr/>
-        <p:nvPr/>
-      </p:nvGrpSpPr>
-      <p:grpSpPr/>
-      <p:sp>
-        <p:nvSpPr>
-          <p:cNvPr id="2" name="Rectangle 1"/>
-          <p:cNvSpPr/>
-          <p:nvPr/>
-        </p:nvSpPr>
-        <p:spPr>
-          <a:xfrm>
-            <a:off x="868680" y="960120"/>
-            <a:ext cx="1051560" cy="50292"/>
-          </a:xfrm>
-          <a:prstGeom prst="rect">
-            <a:avLst/>
-          </a:prstGeom>
-          <a:solidFill>
-            <a:srgbClr val="A8243B"/>
-          </a:solidFill>
-          <a:ln>
-            <a:noFill/>
-          </a:ln>
-          <a:effectLst/>
-        </p:spPr>
-        <p:style>
-          <a:lnRef idx="1">
-            <a:schemeClr val="accent1"/>
-          </a:lnRef>
-          <a:fillRef idx="3">
-            <a:schemeClr val="accent1"/>
-          </a:fillRef>
-          <a:effectRef idx="2">
-            <a:schemeClr val="accent1"/>
-          </a:effectRef>
-          <a:fontRef idx="minor">
-            <a:schemeClr val="lt1"/>
-          </a:fontRef>
-        </p:style>
-        <p:txBody>
-          <a:bodyPr rtlCol="0" anchor="ctr"/>
-          <a:lstStyle/>
-          <a:p>
-            <a:pPr algn="ctr"/>
-          </a:p>
-        </p:txBody>
-      </p:sp>
-      <p:sp>
-        <p:nvSpPr>
-          <p:cNvPr id="3" name="TextBox 2"/>
-          <p:cNvSpPr txBox="1"/>
-          <p:nvPr/>
-        </p:nvSpPr>
-        <p:spPr>
-          <a:xfrm>
-            <a:off x="868680" y="1216152"/>
-            <a:ext cx="10454335" cy="914400"/>
-          </a:xfrm>
-          <a:prstGeom prst="rect">
-            <a:avLst/>
-          </a:prstGeom>
-          <a:noFill/>
-        </p:spPr>
-        <p:txBody>
-          <a:bodyPr wrap="square" lIns="0" rIns="0" tIns="0" bIns="0">
-            <a:spAutoFit/>
-          </a:bodyPr>
-          <a:lstStyle/>
-          <a:p>
-            <a:pPr algn="l">
-              <a:lnSpc>
-                <a:spcPct val="115000"/>
-              </a:lnSpc>
-              <a:spcAft>
-                <a:spcPts val="0"/>
-              </a:spcAft>
-            </a:pPr>
-            <a:r>
-              <a:rPr sz="3400" b="1">
-                <a:solidFill>
-                  <a:srgbClr val="14203A"/>
-                </a:solidFill>
-                <a:latin typeface="Segoe UI"/>
-              </a:rPr>
-              <a:t>Recorded, and deliberately not built</a:t>
-            </a:r>
-          </a:p>
-        </p:txBody>
-      </p:sp>
-      <p:sp>
-        <p:nvSpPr>
-          <p:cNvPr id="4" name="Oval 3"/>
-          <p:cNvSpPr/>
-          <p:nvPr/>
-        </p:nvSpPr>
-        <p:spPr>
-          <a:xfrm>
-            <a:off x="868680" y="2249424"/>
-            <a:ext cx="91440" cy="91440"/>
-          </a:xfrm>
-          <a:prstGeom prst="ellipse">
-            <a:avLst/>
-          </a:prstGeom>
-          <a:solidFill>
-            <a:srgbClr val="A8243B"/>
-          </a:solidFill>
-          <a:ln>
-            <a:noFill/>
-          </a:ln>
-          <a:effectLst/>
-        </p:spPr>
-        <p:style>
-          <a:lnRef idx="1">
-            <a:schemeClr val="accent1"/>
-          </a:lnRef>
-          <a:fillRef idx="3">
-            <a:schemeClr val="accent1"/>
-          </a:fillRef>
-          <a:effectRef idx="2">
-            <a:schemeClr val="accent1"/>
-          </a:effectRef>
-          <a:fontRef idx="minor">
-            <a:schemeClr val="lt1"/>
-          </a:fontRef>
-        </p:style>
-        <p:txBody>
-          <a:bodyPr rtlCol="0" anchor="ctr"/>
-          <a:lstStyle/>
-          <a:p>
-            <a:pPr algn="ctr"/>
-          </a:p>
-        </p:txBody>
-      </p:sp>
-      <p:sp>
-        <p:nvSpPr>
-          <p:cNvPr id="5" name="TextBox 4"/>
-          <p:cNvSpPr txBox="1"/>
-          <p:nvPr/>
-        </p:nvSpPr>
-        <p:spPr>
-          <a:xfrm>
-            <a:off x="1252728" y="2103120"/>
-            <a:ext cx="9966960" cy="1005840"/>
-          </a:xfrm>
-          <a:prstGeom prst="rect">
-            <a:avLst/>
-          </a:prstGeom>
-          <a:noFill/>
-        </p:spPr>
-        <p:txBody>
-          <a:bodyPr wrap="square" lIns="0" rIns="0" tIns="0" bIns="0">
-            <a:spAutoFit/>
-          </a:bodyPr>
-          <a:lstStyle/>
-          <a:p>
-            <a:pPr algn="l">
-              <a:lnSpc>
-                <a:spcPct val="140000"/>
-              </a:lnSpc>
-              <a:spcAft>
-                <a:spcPts val="0"/>
-              </a:spcAft>
-            </a:pPr>
-            <a:r>
-              <a:rPr sz="1550" b="0">
-                <a:solidFill>
-                  <a:srgbClr val="14203A"/>
-                </a:solidFill>
-                <a:latin typeface="Segoe UI"/>
-              </a:rPr>
-              <a:t>One requirement with several satisfaction paths — « ou, à défaut… » — matching the alternatives rather than only flagging them.</a:t>
-            </a:r>
-          </a:p>
-        </p:txBody>
-      </p:sp>
-      <p:sp>
-        <p:nvSpPr>
-          <p:cNvPr id="6" name="Oval 5"/>
-          <p:cNvSpPr/>
-          <p:nvPr/>
-        </p:nvSpPr>
-        <p:spPr>
-          <a:xfrm>
-            <a:off x="868680" y="3209544"/>
-            <a:ext cx="91440" cy="91440"/>
-          </a:xfrm>
-          <a:prstGeom prst="ellipse">
-            <a:avLst/>
-          </a:prstGeom>
-          <a:solidFill>
-            <a:srgbClr val="A8243B"/>
-          </a:solidFill>
-          <a:ln>
-            <a:noFill/>
-          </a:ln>
-          <a:effectLst/>
-        </p:spPr>
-        <p:style>
-          <a:lnRef idx="1">
-            <a:schemeClr val="accent1"/>
-          </a:lnRef>
-          <a:fillRef idx="3">
-            <a:schemeClr val="accent1"/>
-          </a:fillRef>
-          <a:effectRef idx="2">
-            <a:schemeClr val="accent1"/>
-          </a:effectRef>
-          <a:fontRef idx="minor">
-            <a:schemeClr val="lt1"/>
-          </a:fontRef>
-        </p:style>
-        <p:txBody>
-          <a:bodyPr rtlCol="0" anchor="ctr"/>
-          <a:lstStyle/>
-          <a:p>
-            <a:pPr algn="ctr"/>
-          </a:p>
-        </p:txBody>
-      </p:sp>
-      <p:sp>
-        <p:nvSpPr>
-          <p:cNvPr id="7" name="TextBox 6"/>
-          <p:cNvSpPr txBox="1"/>
-          <p:nvPr/>
-        </p:nvSpPr>
-        <p:spPr>
-          <a:xfrm>
-            <a:off x="1252728" y="3063239"/>
-            <a:ext cx="9966960" cy="1005840"/>
-          </a:xfrm>
-          <a:prstGeom prst="rect">
-            <a:avLst/>
-          </a:prstGeom>
-          <a:noFill/>
-        </p:spPr>
-        <p:txBody>
-          <a:bodyPr wrap="square" lIns="0" rIns="0" tIns="0" bIns="0">
-            <a:spAutoFit/>
-          </a:bodyPr>
-          <a:lstStyle/>
-          <a:p>
-            <a:pPr algn="l">
-              <a:lnSpc>
-                <a:spcPct val="140000"/>
-              </a:lnSpc>
-              <a:spcAft>
-                <a:spcPts val="0"/>
-              </a:spcAft>
-            </a:pPr>
-            <a:r>
-              <a:rPr sz="1550" b="0">
-                <a:solidFill>
-                  <a:srgbClr val="14203A"/>
-                </a:solidFill>
-                <a:latin typeface="Segoe UI"/>
-              </a:rPr>
-              <a:t>Requirements the buyer can obtain itself from an official register, and which are legitimately absent from any folder.</a:t>
-            </a:r>
-          </a:p>
-        </p:txBody>
-      </p:sp>
-      <p:sp>
-        <p:nvSpPr>
-          <p:cNvPr id="8" name="Oval 7"/>
-          <p:cNvSpPr/>
-          <p:nvPr/>
-        </p:nvSpPr>
-        <p:spPr>
-          <a:xfrm>
-            <a:off x="868680" y="4169663"/>
-            <a:ext cx="91440" cy="91440"/>
-          </a:xfrm>
-          <a:prstGeom prst="ellipse">
-            <a:avLst/>
-          </a:prstGeom>
-          <a:solidFill>
-            <a:srgbClr val="A8243B"/>
-          </a:solidFill>
-          <a:ln>
-            <a:noFill/>
-          </a:ln>
-          <a:effectLst/>
-        </p:spPr>
-        <p:style>
-          <a:lnRef idx="1">
-            <a:schemeClr val="accent1"/>
-          </a:lnRef>
-          <a:fillRef idx="3">
-            <a:schemeClr val="accent1"/>
-          </a:fillRef>
-          <a:effectRef idx="2">
-            <a:schemeClr val="accent1"/>
-          </a:effectRef>
-          <a:fontRef idx="minor">
-            <a:schemeClr val="lt1"/>
-          </a:fontRef>
-        </p:style>
-        <p:txBody>
-          <a:bodyPr rtlCol="0" anchor="ctr"/>
-          <a:lstStyle/>
-          <a:p>
-            <a:pPr algn="ctr"/>
-          </a:p>
-        </p:txBody>
-      </p:sp>
-      <p:sp>
-        <p:nvSpPr>
-          <p:cNvPr id="9" name="TextBox 8"/>
-          <p:cNvSpPr txBox="1"/>
-          <p:nvPr/>
-        </p:nvSpPr>
-        <p:spPr>
-          <a:xfrm>
-            <a:off x="1252728" y="4023359"/>
-            <a:ext cx="9966960" cy="1005840"/>
-          </a:xfrm>
-          <a:prstGeom prst="rect">
-            <a:avLst/>
-          </a:prstGeom>
-          <a:noFill/>
-        </p:spPr>
-        <p:txBody>
-          <a:bodyPr wrap="square" lIns="0" rIns="0" tIns="0" bIns="0">
-            <a:spAutoFit/>
-          </a:bodyPr>
-          <a:lstStyle/>
-          <a:p>
-            <a:pPr algn="l">
-              <a:lnSpc>
-                <a:spcPct val="140000"/>
-              </a:lnSpc>
-              <a:spcAft>
-                <a:spcPts val="0"/>
-              </a:spcAft>
-            </a:pPr>
-            <a:r>
-              <a:rPr sz="1550" b="0">
-                <a:solidFill>
-                  <a:srgbClr val="14203A"/>
-                </a:solidFill>
-                <a:latin typeface="Segoe UI"/>
-              </a:rPr>
-              <a:t>Groups of operators: the document checklist multiplies per member while the capacity thresholds are assessed on the group as a whole.</a:t>
-            </a:r>
-          </a:p>
-        </p:txBody>
-      </p:sp>
-      <p:sp>
-        <p:nvSpPr>
-          <p:cNvPr id="10" name="TextBox 9"/>
-          <p:cNvSpPr txBox="1"/>
-          <p:nvPr/>
-        </p:nvSpPr>
-        <p:spPr>
-          <a:xfrm>
-            <a:off x="868680" y="5303519"/>
-            <a:ext cx="10454335" cy="914400"/>
-          </a:xfrm>
-          <a:prstGeom prst="rect">
-            <a:avLst/>
-          </a:prstGeom>
-          <a:noFill/>
-        </p:spPr>
-        <p:txBody>
-          <a:bodyPr wrap="square" lIns="0" rIns="0" tIns="0" bIns="0">
-            <a:spAutoFit/>
-          </a:bodyPr>
-          <a:lstStyle/>
-          <a:p>
-            <a:pPr algn="l">
-              <a:lnSpc>
-                <a:spcPct val="140000"/>
-              </a:lnSpc>
-              <a:spcAft>
-                <a:spcPts val="0"/>
-              </a:spcAft>
-            </a:pPr>
-            <a:r>
-              <a:rPr sz="1400" b="0">
-                <a:solidFill>
-                  <a:srgbClr val="5B6880"/>
-                </a:solidFill>
-                <a:latin typeface="Segoe UI"/>
-              </a:rPr>
-              <a:t>Each one is in samples/real_requirements.json with the sentence that revealed it. Not one was visible from the specification — they came out of reading real documents.</a:t>
-            </a:r>
-          </a:p>
-        </p:txBody>
-      </p:sp>
-    </p:spTree>
-  </p:cSld>
-  <p:clrMapOvr>
-    <a:masterClrMapping/>
-  </p:clrMapOvr>
-</p:sld>
-</file>
-
-<file path=ppt/slides/slide13.xml><?xml version="1.0" encoding="utf-8"?>
+<file path=ppt/slides/slide11.xml><?xml version="1.0" encoding="utf-8"?>
 <p:sld xmlns:a="http://schemas.openxmlformats.org/drawingml/2006/main" xmlns:p="http://schemas.openxmlformats.org/presentationml/2006/main" xmlns:r="http://schemas.openxmlformats.org/officeDocument/2006/relationships">
   <p:cSld>
     <p:bg>
@@ -6389,7 +5389,7 @@
         <p:spPr>
           <a:xfrm>
             <a:off x="6720840" y="2423160"/>
-            <a:ext cx="4206240" cy="2194560"/>
+            <a:ext cx="4206240" cy="1737360"/>
           </a:xfrm>
           <a:prstGeom prst="rect">
             <a:avLst/>
@@ -6641,11 +5641,11 @@
                 <a:spcPct val="135000"/>
               </a:lnSpc>
               <a:spcAft>
-                <a:spcPts val="1000"/>
+                <a:spcPts val="1200"/>
               </a:spcAft>
             </a:pPr>
             <a:r>
-              <a:rPr sz="1900" b="0">
+              <a:rPr sz="2000" b="0">
                 <a:solidFill>
                   <a:srgbClr val="14203A"/>
                 </a:solidFill>
@@ -6664,13 +5664,13 @@
               </a:spcAft>
             </a:pPr>
             <a:r>
-              <a:rPr sz="1400" b="0">
+              <a:rPr sz="1500" b="0">
                 <a:solidFill>
                   <a:srgbClr val="5B6880"/>
                 </a:solidFill>
                 <a:latin typeface="Segoe UI"/>
               </a:rPr>
-              <a:t>Not an assistant, and it does not chat. It reads a document, checks claims against it, and produces a compliance matrix — the artefact a bid manager would build by hand over an afternoon, if they had one.</a:t>
+              <a:t>Not an assistant, and it does not chat. It reads a document, checks every claim against it, and produces a compliance matrix.</a:t>
             </a:r>
           </a:p>
         </p:txBody>
@@ -6683,8 +5683,8 @@
         </p:nvSpPr>
         <p:spPr>
           <a:xfrm>
-            <a:off x="868680" y="4069080"/>
-            <a:ext cx="10454335" cy="1417320"/>
+            <a:off x="868680" y="4023360"/>
+            <a:ext cx="10454335" cy="1463040"/>
           </a:xfrm>
           <a:prstGeom prst="rect">
             <a:avLst/>
@@ -6727,7 +5727,7 @@
         </p:nvSpPr>
         <p:spPr>
           <a:xfrm>
-            <a:off x="868680" y="4480560"/>
+            <a:off x="868680" y="4453128"/>
             <a:ext cx="10454335" cy="822960"/>
           </a:xfrm>
           <a:prstGeom prst="rect">
@@ -6923,7 +5923,7 @@
         </p:nvSpPr>
         <p:spPr>
           <a:xfrm>
-            <a:off x="868680" y="2103120"/>
+            <a:off x="868680" y="2240279"/>
             <a:ext cx="2834640" cy="411480"/>
           </a:xfrm>
           <a:prstGeom prst="rect">
@@ -6965,7 +5965,7 @@
         </p:nvSpPr>
         <p:spPr>
           <a:xfrm>
-            <a:off x="3931920" y="2075688"/>
+            <a:off x="3931920" y="2203703"/>
             <a:ext cx="7223760" cy="457200"/>
           </a:xfrm>
           <a:prstGeom prst="rect">
@@ -6988,7 +5988,7 @@
               </a:spcAft>
             </a:pPr>
             <a:r>
-              <a:rPr sz="1500" b="0">
+              <a:rPr sz="1600" b="0">
                 <a:solidFill>
                   <a:srgbClr val="14203A"/>
                 </a:solidFill>
@@ -7007,7 +6007,7 @@
         </p:nvSpPr>
         <p:spPr>
           <a:xfrm>
-            <a:off x="868680" y="2505456"/>
+            <a:off x="868680" y="2679191"/>
             <a:ext cx="10454335" cy="9144"/>
           </a:xfrm>
           <a:prstGeom prst="rect">
@@ -7051,7 +6051,7 @@
         </p:nvSpPr>
         <p:spPr>
           <a:xfrm>
-            <a:off x="868680" y="2761487"/>
+            <a:off x="868680" y="2953511"/>
             <a:ext cx="2834640" cy="411480"/>
           </a:xfrm>
           <a:prstGeom prst="rect">
@@ -7093,7 +6093,7 @@
         </p:nvSpPr>
         <p:spPr>
           <a:xfrm>
-            <a:off x="3931920" y="2734056"/>
+            <a:off x="3931920" y="2916935"/>
             <a:ext cx="7223760" cy="457200"/>
           </a:xfrm>
           <a:prstGeom prst="rect">
@@ -7116,7 +6116,7 @@
               </a:spcAft>
             </a:pPr>
             <a:r>
-              <a:rPr sz="1500" b="0">
+              <a:rPr sz="1600" b="0">
                 <a:solidFill>
                   <a:srgbClr val="14203A"/>
                 </a:solidFill>
@@ -7135,7 +6135,7 @@
         </p:nvSpPr>
         <p:spPr>
           <a:xfrm>
-            <a:off x="868680" y="3163823"/>
+            <a:off x="868680" y="3392423"/>
             <a:ext cx="10454335" cy="9144"/>
           </a:xfrm>
           <a:prstGeom prst="rect">
@@ -7179,7 +6179,7 @@
         </p:nvSpPr>
         <p:spPr>
           <a:xfrm>
-            <a:off x="868680" y="3419855"/>
+            <a:off x="868680" y="3666744"/>
             <a:ext cx="2834640" cy="411480"/>
           </a:xfrm>
           <a:prstGeom prst="rect">
@@ -7221,7 +6221,7 @@
         </p:nvSpPr>
         <p:spPr>
           <a:xfrm>
-            <a:off x="3931920" y="3392423"/>
+            <a:off x="3931920" y="3630168"/>
             <a:ext cx="7223760" cy="457200"/>
           </a:xfrm>
           <a:prstGeom prst="rect">
@@ -7244,7 +6244,7 @@
               </a:spcAft>
             </a:pPr>
             <a:r>
-              <a:rPr sz="1500" b="0">
+              <a:rPr sz="1600" b="0">
                 <a:solidFill>
                   <a:srgbClr val="14203A"/>
                 </a:solidFill>
@@ -7263,7 +6263,7 @@
         </p:nvSpPr>
         <p:spPr>
           <a:xfrm>
-            <a:off x="868680" y="3822191"/>
+            <a:off x="868680" y="4105656"/>
             <a:ext cx="10454335" cy="9144"/>
           </a:xfrm>
           <a:prstGeom prst="rect">
@@ -7307,7 +6307,7 @@
         </p:nvSpPr>
         <p:spPr>
           <a:xfrm>
-            <a:off x="868680" y="4078223"/>
+            <a:off x="868680" y="4379976"/>
             <a:ext cx="2834640" cy="411480"/>
           </a:xfrm>
           <a:prstGeom prst="rect">
@@ -7349,7 +6349,7 @@
         </p:nvSpPr>
         <p:spPr>
           <a:xfrm>
-            <a:off x="3931920" y="4050791"/>
+            <a:off x="3931920" y="4343400"/>
             <a:ext cx="7223760" cy="457200"/>
           </a:xfrm>
           <a:prstGeom prst="rect">
@@ -7372,7 +6372,7 @@
               </a:spcAft>
             </a:pPr>
             <a:r>
-              <a:rPr sz="1500" b="0">
+              <a:rPr sz="1600" b="0">
                 <a:solidFill>
                   <a:srgbClr val="14203A"/>
                 </a:solidFill>
@@ -7391,7 +6391,7 @@
         </p:nvSpPr>
         <p:spPr>
           <a:xfrm>
-            <a:off x="868680" y="4480559"/>
+            <a:off x="868680" y="4818888"/>
             <a:ext cx="10454335" cy="9144"/>
           </a:xfrm>
           <a:prstGeom prst="rect">
@@ -7435,8 +6435,8 @@
         </p:nvSpPr>
         <p:spPr>
           <a:xfrm>
-            <a:off x="868680" y="5056631"/>
-            <a:ext cx="10454335" cy="1097280"/>
+            <a:off x="868680" y="5504688"/>
+            <a:ext cx="10454335" cy="914400"/>
           </a:xfrm>
           <a:prstGeom prst="rect">
             <a:avLst/>
@@ -7448,31 +6448,31 @@
             <a:spAutoFit/>
           </a:bodyPr>
           <a:lstStyle/>
+          <a:p>
+            <a:pPr algn="l">
+              <a:lnSpc>
+                <a:spcPct val="135000"/>
+              </a:lnSpc>
+              <a:spcAft>
+                <a:spcPts val="800"/>
+              </a:spcAft>
+            </a:pPr>
+            <a:r>
+              <a:rPr sz="1600" b="1">
+                <a:solidFill>
+                  <a:srgbClr val="14203A"/>
+                </a:solidFill>
+                <a:latin typeface="Segoe UI"/>
+              </a:rPr>
+              <a:t>And two counts, not one: an incomplete candidature is eliminated, an irregular offre may be invited to correct itself.</a:t>
+            </a:r>
+          </a:p>
           <a:p>
             <a:pPr algn="l">
               <a:lnSpc>
                 <a:spcPct val="115000"/>
               </a:lnSpc>
               <a:spcAft>
-                <a:spcPts val="800"/>
-              </a:spcAft>
-            </a:pPr>
-            <a:r>
-              <a:rPr sz="1800" b="1">
-                <a:solidFill>
-                  <a:srgbClr val="14203A"/>
-                </a:solidFill>
-                <a:latin typeface="Segoe UI"/>
-              </a:rPr>
-              <a:t>And two counts rather than one.</a:t>
-            </a:r>
-          </a:p>
-          <a:p>
-            <a:pPr algn="l">
-              <a:lnSpc>
-                <a:spcPct val="140000"/>
-              </a:lnSpc>
-              <a:spcAft>
                 <a:spcPts val="0"/>
               </a:spcAft>
             </a:pPr>
@@ -7483,7 +6483,7 @@
                 </a:solidFill>
                 <a:latin typeface="Segoe UI"/>
               </a:rPr>
-              <a:t>An incomplete candidature is eliminated. An irregular offre may be invited to correct itself. The same missing paper ends the bid in one case and is recoverable in the other — so one number would tell the reader to treat them alike, which is wrong in both directions.</a:t>
+              <a:t>The same missing paper ends the bid in one case and is recoverable in the other.</a:t>
             </a:r>
           </a:p>
         </p:txBody>
@@ -7608,7 +6608,7 @@
         </p:nvSpPr>
         <p:spPr>
           <a:xfrm>
-            <a:off x="868680" y="2103120"/>
+            <a:off x="868680" y="2194560"/>
             <a:ext cx="3657600" cy="365760"/>
           </a:xfrm>
           <a:prstGeom prst="rect">
@@ -7631,7 +6631,7 @@
               </a:spcAft>
             </a:pPr>
             <a:r>
-              <a:rPr sz="1450" b="1">
+              <a:rPr sz="1500" b="1">
                 <a:solidFill>
                   <a:srgbClr val="14203A"/>
                 </a:solidFill>
@@ -7650,7 +6650,7 @@
         </p:nvSpPr>
         <p:spPr>
           <a:xfrm>
-            <a:off x="4663440" y="2121408"/>
+            <a:off x="4663440" y="2221991"/>
             <a:ext cx="1828800" cy="365760"/>
           </a:xfrm>
           <a:prstGeom prst="rect">
@@ -7692,7 +6692,7 @@
         </p:nvSpPr>
         <p:spPr>
           <a:xfrm>
-            <a:off x="6537960" y="2112263"/>
+            <a:off x="6537960" y="2212848"/>
             <a:ext cx="4754880" cy="457200"/>
           </a:xfrm>
           <a:prstGeom prst="rect">
@@ -7715,7 +6715,7 @@
               </a:spcAft>
             </a:pPr>
             <a:r>
-              <a:rPr sz="1250" b="0">
+              <a:rPr sz="1300" b="0">
                 <a:solidFill>
                   <a:srgbClr val="5B6880"/>
                 </a:solidFill>
@@ -7734,7 +6734,7 @@
         </p:nvSpPr>
         <p:spPr>
           <a:xfrm>
-            <a:off x="868680" y="2670048"/>
+            <a:off x="868680" y="2816352"/>
             <a:ext cx="3657600" cy="365760"/>
           </a:xfrm>
           <a:prstGeom prst="rect">
@@ -7757,7 +6757,7 @@
               </a:spcAft>
             </a:pPr>
             <a:r>
-              <a:rPr sz="1450" b="1">
+              <a:rPr sz="1500" b="1">
                 <a:solidFill>
                   <a:srgbClr val="14203A"/>
                 </a:solidFill>
@@ -7776,7 +6776,7 @@
         </p:nvSpPr>
         <p:spPr>
           <a:xfrm>
-            <a:off x="4663440" y="2688336"/>
+            <a:off x="4663440" y="2843784"/>
             <a:ext cx="1828800" cy="365760"/>
           </a:xfrm>
           <a:prstGeom prst="rect">
@@ -7818,7 +6818,7 @@
         </p:nvSpPr>
         <p:spPr>
           <a:xfrm>
-            <a:off x="6537960" y="2679191"/>
+            <a:off x="6537960" y="2834640"/>
             <a:ext cx="4754880" cy="457200"/>
           </a:xfrm>
           <a:prstGeom prst="rect">
@@ -7841,7 +6841,7 @@
               </a:spcAft>
             </a:pPr>
             <a:r>
-              <a:rPr sz="1250" b="0">
+              <a:rPr sz="1300" b="0">
                 <a:solidFill>
                   <a:srgbClr val="5B6880"/>
                 </a:solidFill>
@@ -7860,7 +6860,7 @@
         </p:nvSpPr>
         <p:spPr>
           <a:xfrm>
-            <a:off x="868680" y="3236976"/>
+            <a:off x="868680" y="3438144"/>
             <a:ext cx="3657600" cy="365760"/>
           </a:xfrm>
           <a:prstGeom prst="rect">
@@ -7883,7 +6883,7 @@
               </a:spcAft>
             </a:pPr>
             <a:r>
-              <a:rPr sz="1450" b="1">
+              <a:rPr sz="1500" b="1">
                 <a:solidFill>
                   <a:srgbClr val="14203A"/>
                 </a:solidFill>
@@ -7902,7 +6902,7 @@
         </p:nvSpPr>
         <p:spPr>
           <a:xfrm>
-            <a:off x="4663440" y="3255264"/>
+            <a:off x="4663440" y="3465576"/>
             <a:ext cx="1828800" cy="365760"/>
           </a:xfrm>
           <a:prstGeom prst="rect">
@@ -7944,7 +6944,7 @@
         </p:nvSpPr>
         <p:spPr>
           <a:xfrm>
-            <a:off x="6537960" y="3246120"/>
+            <a:off x="6537960" y="3456432"/>
             <a:ext cx="4754880" cy="457200"/>
           </a:xfrm>
           <a:prstGeom prst="rect">
@@ -7967,7 +6967,7 @@
               </a:spcAft>
             </a:pPr>
             <a:r>
-              <a:rPr sz="1250" b="0">
+              <a:rPr sz="1300" b="0">
                 <a:solidFill>
                   <a:srgbClr val="5B6880"/>
                 </a:solidFill>
@@ -7986,7 +6986,7 @@
         </p:nvSpPr>
         <p:spPr>
           <a:xfrm>
-            <a:off x="868680" y="3803904"/>
+            <a:off x="868680" y="4059936"/>
             <a:ext cx="3657600" cy="365760"/>
           </a:xfrm>
           <a:prstGeom prst="rect">
@@ -8009,7 +7009,7 @@
               </a:spcAft>
             </a:pPr>
             <a:r>
-              <a:rPr sz="1450" b="1">
+              <a:rPr sz="1500" b="1">
                 <a:solidFill>
                   <a:srgbClr val="14203A"/>
                 </a:solidFill>
@@ -8028,7 +7028,7 @@
         </p:nvSpPr>
         <p:spPr>
           <a:xfrm>
-            <a:off x="4663440" y="3822191"/>
+            <a:off x="4663440" y="4087368"/>
             <a:ext cx="1828800" cy="365760"/>
           </a:xfrm>
           <a:prstGeom prst="rect">
@@ -8070,7 +7070,7 @@
         </p:nvSpPr>
         <p:spPr>
           <a:xfrm>
-            <a:off x="6537960" y="3813048"/>
+            <a:off x="6537960" y="4078224"/>
             <a:ext cx="4754880" cy="457200"/>
           </a:xfrm>
           <a:prstGeom prst="rect">
@@ -8093,7 +7093,7 @@
               </a:spcAft>
             </a:pPr>
             <a:r>
-              <a:rPr sz="1250" b="0">
+              <a:rPr sz="1300" b="0">
                 <a:solidFill>
                   <a:srgbClr val="5B6880"/>
                 </a:solidFill>
@@ -8112,7 +7112,7 @@
         </p:nvSpPr>
         <p:spPr>
           <a:xfrm>
-            <a:off x="868680" y="4645152"/>
+            <a:off x="868680" y="5047488"/>
             <a:ext cx="10454335" cy="1463040"/>
           </a:xfrm>
           <a:prstGeom prst="rect">
@@ -8131,11 +7131,11 @@
                 <a:spcPct val="115000"/>
               </a:lnSpc>
               <a:spcAft>
-                <a:spcPts val="1400"/>
+                <a:spcPts val="1600"/>
               </a:spcAft>
             </a:pPr>
             <a:r>
-              <a:rPr sz="1450" b="0">
+              <a:rPr sz="1500" b="0">
                 <a:solidFill>
                   <a:srgbClr val="14203A"/>
                 </a:solidFill>
@@ -8154,7 +7154,7 @@
               </a:spcAft>
             </a:pPr>
             <a:r>
-              <a:rPr sz="1450" b="1">
+              <a:rPr sz="1500" b="1">
                 <a:solidFill>
                   <a:srgbClr val="A8243B"/>
                 </a:solidFill>
@@ -8199,7 +7199,7 @@
         </p:nvSpPr>
         <p:spPr>
           <a:xfrm>
-            <a:off x="868680" y="2651760"/>
+            <a:off x="868680" y="2148840"/>
             <a:ext cx="1463040" cy="50292"/>
           </a:xfrm>
           <a:prstGeom prst="rect">
@@ -8243,8 +7243,8 @@
         </p:nvSpPr>
         <p:spPr>
           <a:xfrm>
-            <a:off x="868680" y="3017520"/>
-            <a:ext cx="10454335" cy="1828800"/>
+            <a:off x="868680" y="2514600"/>
+            <a:ext cx="10454335" cy="2377440"/>
           </a:xfrm>
           <a:prstGeom prst="rect">
             <a:avLst/>
@@ -8262,17 +7262,36 @@
                 <a:spcPct val="115000"/>
               </a:lnSpc>
               <a:spcAft>
-                <a:spcPts val="1600"/>
+                <a:spcPts val="2200"/>
               </a:spcAft>
             </a:pPr>
             <a:r>
-              <a:rPr sz="4000" b="1">
+              <a:rPr sz="4200" b="1">
                 <a:solidFill>
                   <a:srgbClr val="FFFFFF"/>
                 </a:solidFill>
                 <a:latin typeface="Segoe UI"/>
               </a:rPr>
-              <a:t>▶  Live run — DGAC, French</a:t>
+              <a:t>▶  Live, in both languages</a:t>
+            </a:r>
+          </a:p>
+          <a:p>
+            <a:pPr algn="l">
+              <a:lnSpc>
+                <a:spcPct val="115000"/>
+              </a:lnSpc>
+              <a:spcAft>
+                <a:spcPts val="800"/>
+              </a:spcAft>
+            </a:pPr>
+            <a:r>
+              <a:rPr sz="1900" b="0">
+                <a:solidFill>
+                  <a:srgbClr val="C9D6E8"/>
+                </a:solidFill>
+                <a:latin typeface="Georgia"/>
+              </a:rPr>
+              <a:t>DGAC, French — 17 s.        European Parliament, English — 35 s.</a:t>
             </a:r>
           </a:p>
           <a:p>
@@ -8285,13 +7304,13 @@
               </a:spcAft>
             </a:pPr>
             <a:r>
-              <a:rPr sz="1700" b="0">
+              <a:rPr sz="1900" b="0">
                 <a:solidFill>
                   <a:srgbClr val="C9D6E8"/>
                 </a:solidFill>
                 <a:latin typeface="Georgia"/>
               </a:rPr>
-              <a:t>17 s on 2026-09-04. Nothing here is replayed.</a:t>
+              <a:t>Nothing here is replayed.</a:t>
             </a:r>
           </a:p>
         </p:txBody>
@@ -8352,7 +7371,7 @@
     <p:bg>
       <p:bgPr>
         <a:solidFill>
-          <a:srgbClr val="14203A"/>
+          <a:srgbClr val="F6F8FB"/>
         </a:solidFill>
         <a:effectLst/>
       </p:bgPr>
@@ -8372,8 +7391,8 @@
         </p:nvSpPr>
         <p:spPr>
           <a:xfrm>
-            <a:off x="868680" y="2651760"/>
-            <a:ext cx="1463040" cy="50292"/>
+            <a:off x="868680" y="960120"/>
+            <a:ext cx="1051560" cy="50292"/>
           </a:xfrm>
           <a:prstGeom prst="rect">
             <a:avLst/>
@@ -8416,8 +7435,8 @@
         </p:nvSpPr>
         <p:spPr>
           <a:xfrm>
-            <a:off x="868680" y="3017520"/>
-            <a:ext cx="10454335" cy="1828800"/>
+            <a:off x="868680" y="1216152"/>
+            <a:ext cx="10454335" cy="914400"/>
           </a:xfrm>
           <a:prstGeom prst="rect">
             <a:avLst/>
@@ -8429,25 +7448,6 @@
             <a:spAutoFit/>
           </a:bodyPr>
           <a:lstStyle/>
-          <a:p>
-            <a:pPr algn="l">
-              <a:lnSpc>
-                <a:spcPct val="115000"/>
-              </a:lnSpc>
-              <a:spcAft>
-                <a:spcPts val="1600"/>
-              </a:spcAft>
-            </a:pPr>
-            <a:r>
-              <a:rPr sz="4000" b="1">
-                <a:solidFill>
-                  <a:srgbClr val="FFFFFF"/>
-                </a:solidFill>
-                <a:latin typeface="Segoe UI"/>
-              </a:rPr>
-              <a:t>▶  Live run — European Parliament, English</a:t>
-            </a:r>
-          </a:p>
           <a:p>
             <a:pPr algn="l">
               <a:lnSpc>
@@ -8458,13 +7458,13 @@
               </a:spcAft>
             </a:pPr>
             <a:r>
-              <a:rPr sz="1700" b="0">
-                <a:solidFill>
-                  <a:srgbClr val="C9D6E8"/>
-                </a:solidFill>
-                <a:latin typeface="Georgia"/>
+              <a:rPr sz="3400" b="1">
+                <a:solidFill>
+                  <a:srgbClr val="14203A"/>
+                </a:solidFill>
+                <a:latin typeface="Segoe UI"/>
               </a:rPr>
-              <a:t>Same tool, a tender written in English. Watch for what is not on the screen.</a:t>
+              <a:t>What the real files gave back</a:t>
             </a:r>
           </a:p>
         </p:txBody>
@@ -8477,8 +7477,8 @@
         </p:nvSpPr>
         <p:spPr>
           <a:xfrm>
-            <a:off x="868680" y="5669280"/>
-            <a:ext cx="10454335" cy="457200"/>
+            <a:off x="868680" y="2286000"/>
+            <a:ext cx="2103120" cy="685800"/>
           </a:xfrm>
           <a:prstGeom prst="rect">
             <a:avLst/>
@@ -8500,13 +7500,265 @@
               </a:spcAft>
             </a:pPr>
             <a:r>
-              <a:rPr sz="1050" b="0" spc="140">
-                <a:solidFill>
-                  <a:srgbClr val="5B6880"/>
+              <a:rPr sz="3400" b="1">
+                <a:solidFill>
+                  <a:srgbClr val="A8243B"/>
                 </a:solidFill>
                 <a:latin typeface="Segoe UI"/>
               </a:rPr>
-              <a:t>CUT THIS SLIDE IN THE EDIT — IT MARKS WHERE THE SCREEN RECORDING GOES</a:t>
+              <a:t>−9 d</a:t>
+            </a:r>
+          </a:p>
+        </p:txBody>
+      </p:sp>
+      <p:sp>
+        <p:nvSpPr>
+          <p:cNvPr id="5" name="TextBox 4"/>
+          <p:cNvSpPr txBox="1"/>
+          <p:nvPr/>
+        </p:nvSpPr>
+        <p:spPr>
+          <a:xfrm>
+            <a:off x="3154680" y="2350008"/>
+            <a:ext cx="8092440" cy="1188720"/>
+          </a:xfrm>
+          <a:prstGeom prst="rect">
+            <a:avLst/>
+          </a:prstGeom>
+          <a:noFill/>
+        </p:spPr>
+        <p:txBody>
+          <a:bodyPr wrap="square" lIns="0" rIns="0" tIns="0" bIns="0">
+            <a:spAutoFit/>
+          </a:bodyPr>
+          <a:lstStyle/>
+          <a:p>
+            <a:pPr algn="l">
+              <a:lnSpc>
+                <a:spcPct val="140000"/>
+              </a:lnSpc>
+              <a:spcAft>
+                <a:spcPts val="0"/>
+              </a:spcAft>
+            </a:pPr>
+            <a:r>
+              <a:rPr sz="1500" b="0">
+                <a:solidFill>
+                  <a:srgbClr val="14203A"/>
+                </a:solidFill>
+                <a:latin typeface="Segoe UI"/>
+              </a:rPr>
+              <a:t>An insurance certificate valid today and expired on the day bids are due. Nobody catches that by reading — it is a subtraction.</a:t>
+            </a:r>
+          </a:p>
+        </p:txBody>
+      </p:sp>
+      <p:sp>
+        <p:nvSpPr>
+          <p:cNvPr id="6" name="TextBox 5"/>
+          <p:cNvSpPr txBox="1"/>
+          <p:nvPr/>
+        </p:nvSpPr>
+        <p:spPr>
+          <a:xfrm>
+            <a:off x="868680" y="3657600"/>
+            <a:ext cx="2103120" cy="685800"/>
+          </a:xfrm>
+          <a:prstGeom prst="rect">
+            <a:avLst/>
+          </a:prstGeom>
+          <a:noFill/>
+        </p:spPr>
+        <p:txBody>
+          <a:bodyPr wrap="square" lIns="0" rIns="0" tIns="0" bIns="0">
+            <a:spAutoFit/>
+          </a:bodyPr>
+          <a:lstStyle/>
+          <a:p>
+            <a:pPr algn="l">
+              <a:lnSpc>
+                <a:spcPct val="115000"/>
+              </a:lnSpc>
+              <a:spcAft>
+                <a:spcPts val="0"/>
+              </a:spcAft>
+            </a:pPr>
+            <a:r>
+              <a:rPr sz="3400" b="1">
+                <a:solidFill>
+                  <a:srgbClr val="A8243B"/>
+                </a:solidFill>
+                <a:latin typeface="Segoe UI"/>
+              </a:rPr>
+              <a:t>27 / 34</a:t>
+            </a:r>
+          </a:p>
+        </p:txBody>
+      </p:sp>
+      <p:sp>
+        <p:nvSpPr>
+          <p:cNvPr id="7" name="TextBox 6"/>
+          <p:cNvSpPr txBox="1"/>
+          <p:nvPr/>
+        </p:nvSpPr>
+        <p:spPr>
+          <a:xfrm>
+            <a:off x="3154680" y="3721608"/>
+            <a:ext cx="8092440" cy="1188720"/>
+          </a:xfrm>
+          <a:prstGeom prst="rect">
+            <a:avLst/>
+          </a:prstGeom>
+          <a:noFill/>
+        </p:spPr>
+        <p:txBody>
+          <a:bodyPr wrap="square" lIns="0" rIns="0" tIns="0" bIns="0">
+            <a:spAutoFit/>
+          </a:bodyPr>
+          <a:lstStyle/>
+          <a:p>
+            <a:pPr algn="l">
+              <a:lnSpc>
+                <a:spcPct val="140000"/>
+              </a:lnSpc>
+              <a:spcAft>
+                <a:spcPts val="0"/>
+              </a:spcAft>
+            </a:pPr>
+            <a:r>
+              <a:rPr sz="1500" b="0">
+                <a:solidFill>
+                  <a:srgbClr val="14203A"/>
+                </a:solidFill>
+                <a:latin typeface="Segoe UI"/>
+              </a:rPr>
+              <a:t>Pages of the ANTAI file storing part of their text as images. So the tool refuses to call anything absent, and names the pages to open by hand.</a:t>
+            </a:r>
+          </a:p>
+        </p:txBody>
+      </p:sp>
+      <p:sp>
+        <p:nvSpPr>
+          <p:cNvPr id="8" name="TextBox 7"/>
+          <p:cNvSpPr txBox="1"/>
+          <p:nvPr/>
+        </p:nvSpPr>
+        <p:spPr>
+          <a:xfrm>
+            <a:off x="868680" y="5029200"/>
+            <a:ext cx="2103120" cy="685800"/>
+          </a:xfrm>
+          <a:prstGeom prst="rect">
+            <a:avLst/>
+          </a:prstGeom>
+          <a:noFill/>
+        </p:spPr>
+        <p:txBody>
+          <a:bodyPr wrap="square" lIns="0" rIns="0" tIns="0" bIns="0">
+            <a:spAutoFit/>
+          </a:bodyPr>
+          <a:lstStyle/>
+          <a:p>
+            <a:pPr algn="l">
+              <a:lnSpc>
+                <a:spcPct val="115000"/>
+              </a:lnSpc>
+              <a:spcAft>
+                <a:spcPts val="0"/>
+              </a:spcAft>
+            </a:pPr>
+            <a:r>
+              <a:rPr sz="3400" b="1">
+                <a:solidFill>
+                  <a:srgbClr val="A8243B"/>
+                </a:solidFill>
+                <a:latin typeface="Segoe UI"/>
+              </a:rPr>
+              <a:t>1 of 4</a:t>
+            </a:r>
+          </a:p>
+        </p:txBody>
+      </p:sp>
+      <p:sp>
+        <p:nvSpPr>
+          <p:cNvPr id="9" name="TextBox 8"/>
+          <p:cNvSpPr txBox="1"/>
+          <p:nvPr/>
+        </p:nvSpPr>
+        <p:spPr>
+          <a:xfrm>
+            <a:off x="3154680" y="5093208"/>
+            <a:ext cx="8092440" cy="1188720"/>
+          </a:xfrm>
+          <a:prstGeom prst="rect">
+            <a:avLst/>
+          </a:prstGeom>
+          <a:noFill/>
+        </p:spPr>
+        <p:txBody>
+          <a:bodyPr wrap="square" lIns="0" rIns="0" tIns="0" bIns="0">
+            <a:spAutoFit/>
+          </a:bodyPr>
+          <a:lstStyle/>
+          <a:p>
+            <a:pPr algn="l">
+              <a:lnSpc>
+                <a:spcPct val="140000"/>
+              </a:lnSpc>
+              <a:spcAft>
+                <a:spcPts val="0"/>
+              </a:spcAft>
+            </a:pPr>
+            <a:r>
+              <a:rPr sz="1500" b="0">
+                <a:solidFill>
+                  <a:srgbClr val="14203A"/>
+                </a:solidFill>
+                <a:latin typeface="Segoe UI"/>
+              </a:rPr>
+              <a:t>Requirements in the “English” EFSA pack that are written in French — found on the first run of a real document.</a:t>
+            </a:r>
+          </a:p>
+        </p:txBody>
+      </p:sp>
+      <p:sp>
+        <p:nvSpPr>
+          <p:cNvPr id="10" name="TextBox 9"/>
+          <p:cNvSpPr txBox="1"/>
+          <p:nvPr/>
+        </p:nvSpPr>
+        <p:spPr>
+          <a:xfrm>
+            <a:off x="868680" y="5943600"/>
+            <a:ext cx="10454335" cy="548640"/>
+          </a:xfrm>
+          <a:prstGeom prst="rect">
+            <a:avLst/>
+          </a:prstGeom>
+          <a:noFill/>
+        </p:spPr>
+        <p:txBody>
+          <a:bodyPr wrap="square" lIns="0" rIns="0" tIns="0" bIns="0">
+            <a:spAutoFit/>
+          </a:bodyPr>
+          <a:lstStyle/>
+          <a:p>
+            <a:pPr algn="l">
+              <a:lnSpc>
+                <a:spcPct val="115000"/>
+              </a:lnSpc>
+              <a:spcAft>
+                <a:spcPts val="0"/>
+              </a:spcAft>
+            </a:pPr>
+            <a:r>
+              <a:rPr sz="1350" b="0">
+                <a:solidFill>
+                  <a:srgbClr val="5B6880"/>
+                </a:solidFill>
+                <a:latin typeface="Segoe UI"/>
+              </a:rPr>
+              <a:t>Every count moves between runs. Every quotation, and every verdict computed from it, does not.</a:t>
             </a:r>
           </a:p>
         </p:txBody>
@@ -8545,7 +7797,7 @@
         </p:nvSpPr>
         <p:spPr>
           <a:xfrm>
-            <a:off x="868680" y="960120"/>
+            <a:off x="868680" y="502920"/>
             <a:ext cx="1051560" cy="50292"/>
           </a:xfrm>
           <a:prstGeom prst="rect">
@@ -8589,8 +7841,8 @@
         </p:nvSpPr>
         <p:spPr>
           <a:xfrm>
-            <a:off x="868680" y="1216152"/>
-            <a:ext cx="10454335" cy="914400"/>
+            <a:off x="868680" y="758952"/>
+            <a:ext cx="10454335" cy="548640"/>
           </a:xfrm>
           <a:prstGeom prst="rect">
             <a:avLst/>
@@ -8612,27 +7864,95 @@
               </a:spcAft>
             </a:pPr>
             <a:r>
-              <a:rPr sz="3400" b="1">
+              <a:rPr sz="3000" b="1">
                 <a:solidFill>
                   <a:srgbClr val="14203A"/>
                 </a:solidFill>
                 <a:latin typeface="Segoe UI"/>
               </a:rPr>
-              <a:t>What the real files gave back</a:t>
-            </a:r>
-          </a:p>
-        </p:txBody>
-      </p:sp>
-      <p:sp>
-        <p:nvSpPr>
-          <p:cNvPr id="4" name="TextBox 3"/>
+              <a:t>How it does it</a:t>
+            </a:r>
+          </a:p>
+        </p:txBody>
+      </p:sp>
+      <p:pic>
+        <p:nvPicPr>
+          <p:cNvPr id="4" name="Picture 3" descr="architecture.png"/>
+          <p:cNvPicPr>
+            <a:picLocks noChangeAspect="1"/>
+          </p:cNvPicPr>
+          <p:nvPr/>
+        </p:nvPicPr>
+        <p:blipFill>
+          <a:blip r:embed="rId2"/>
+          <a:stretch>
+            <a:fillRect/>
+          </a:stretch>
+        </p:blipFill>
+        <p:spPr>
+          <a:xfrm>
+            <a:off x="670134" y="1417320"/>
+            <a:ext cx="10851426" cy="4343400"/>
+          </a:xfrm>
+          <a:prstGeom prst="rect">
+            <a:avLst/>
+          </a:prstGeom>
+        </p:spPr>
+      </p:pic>
+      <p:sp>
+        <p:nvSpPr>
+          <p:cNvPr id="5" name="Rectangle 4"/>
+          <p:cNvSpPr/>
+          <p:nvPr/>
+        </p:nvSpPr>
+        <p:spPr>
+          <a:xfrm>
+            <a:off x="868680" y="5897880"/>
+            <a:ext cx="10454335" cy="713232"/>
+          </a:xfrm>
+          <a:prstGeom prst="rect">
+            <a:avLst/>
+          </a:prstGeom>
+          <a:solidFill>
+            <a:srgbClr val="14203A"/>
+          </a:solidFill>
+          <a:ln>
+            <a:noFill/>
+          </a:ln>
+          <a:effectLst/>
+        </p:spPr>
+        <p:style>
+          <a:lnRef idx="1">
+            <a:schemeClr val="accent1"/>
+          </a:lnRef>
+          <a:fillRef idx="3">
+            <a:schemeClr val="accent1"/>
+          </a:fillRef>
+          <a:effectRef idx="2">
+            <a:schemeClr val="accent1"/>
+          </a:effectRef>
+          <a:fontRef idx="minor">
+            <a:schemeClr val="lt1"/>
+          </a:fontRef>
+        </p:style>
+        <p:txBody>
+          <a:bodyPr rtlCol="0" anchor="ctr"/>
+          <a:lstStyle/>
+          <a:p>
+            <a:pPr algn="ctr"/>
+          </a:p>
+        </p:txBody>
+      </p:sp>
+      <p:sp>
+        <p:nvSpPr>
+          <p:cNvPr id="6" name="TextBox 5"/>
           <p:cNvSpPr txBox="1"/>
           <p:nvPr/>
         </p:nvSpPr>
         <p:spPr>
           <a:xfrm>
-            <a:off x="868680" y="2103120"/>
-            <a:ext cx="2103120" cy="685800"/>
+            <a:off x="1234440" y="6016752"/>
+            <a:ext cx="9722815" cy="502920"/>
           </a:xfrm>
           <a:prstGeom prst="rect">
             <a:avLst/>
@@ -8647,272 +7967,20 @@
           <a:p>
             <a:pPr algn="l">
               <a:lnSpc>
-                <a:spcPct val="115000"/>
+                <a:spcPct val="130000"/>
               </a:lnSpc>
               <a:spcAft>
                 <a:spcPts val="0"/>
               </a:spcAft>
             </a:pPr>
             <a:r>
-              <a:rPr sz="3400" b="1">
-                <a:solidFill>
-                  <a:srgbClr val="A8243B"/>
+              <a:rPr sz="1300" b="0">
+                <a:solidFill>
+                  <a:srgbClr val="FFFFFF"/>
                 </a:solidFill>
                 <a:latin typeface="Segoe UI"/>
               </a:rPr>
-              <a:t>−9 d</a:t>
-            </a:r>
-          </a:p>
-        </p:txBody>
-      </p:sp>
-      <p:sp>
-        <p:nvSpPr>
-          <p:cNvPr id="5" name="TextBox 4"/>
-          <p:cNvSpPr txBox="1"/>
-          <p:nvPr/>
-        </p:nvSpPr>
-        <p:spPr>
-          <a:xfrm>
-            <a:off x="3154680" y="2148839"/>
-            <a:ext cx="8092440" cy="1188720"/>
-          </a:xfrm>
-          <a:prstGeom prst="rect">
-            <a:avLst/>
-          </a:prstGeom>
-          <a:noFill/>
-        </p:spPr>
-        <p:txBody>
-          <a:bodyPr wrap="square" lIns="0" rIns="0" tIns="0" bIns="0">
-            <a:spAutoFit/>
-          </a:bodyPr>
-          <a:lstStyle/>
-          <a:p>
-            <a:pPr algn="l">
-              <a:lnSpc>
-                <a:spcPct val="140000"/>
-              </a:lnSpc>
-              <a:spcAft>
-                <a:spcPts val="0"/>
-              </a:spcAft>
-            </a:pPr>
-            <a:r>
-              <a:rPr sz="1450" b="0">
-                <a:solidFill>
-                  <a:srgbClr val="14203A"/>
-                </a:solidFill>
-                <a:latin typeface="Segoe UI"/>
-              </a:rPr>
-              <a:t>An insurance certificate valid today and expired on the day bids are due. Nobody catches that by reading — it is a subtraction.</a:t>
-            </a:r>
-          </a:p>
-        </p:txBody>
-      </p:sp>
-      <p:sp>
-        <p:nvSpPr>
-          <p:cNvPr id="6" name="TextBox 5"/>
-          <p:cNvSpPr txBox="1"/>
-          <p:nvPr/>
-        </p:nvSpPr>
-        <p:spPr>
-          <a:xfrm>
-            <a:off x="868680" y="3520439"/>
-            <a:ext cx="2103120" cy="685800"/>
-          </a:xfrm>
-          <a:prstGeom prst="rect">
-            <a:avLst/>
-          </a:prstGeom>
-          <a:noFill/>
-        </p:spPr>
-        <p:txBody>
-          <a:bodyPr wrap="square" lIns="0" rIns="0" tIns="0" bIns="0">
-            <a:spAutoFit/>
-          </a:bodyPr>
-          <a:lstStyle/>
-          <a:p>
-            <a:pPr algn="l">
-              <a:lnSpc>
-                <a:spcPct val="115000"/>
-              </a:lnSpc>
-              <a:spcAft>
-                <a:spcPts val="0"/>
-              </a:spcAft>
-            </a:pPr>
-            <a:r>
-              <a:rPr sz="3400" b="1">
-                <a:solidFill>
-                  <a:srgbClr val="A8243B"/>
-                </a:solidFill>
-                <a:latin typeface="Segoe UI"/>
-              </a:rPr>
-              <a:t>27 / 34</a:t>
-            </a:r>
-          </a:p>
-        </p:txBody>
-      </p:sp>
-      <p:sp>
-        <p:nvSpPr>
-          <p:cNvPr id="7" name="TextBox 6"/>
-          <p:cNvSpPr txBox="1"/>
-          <p:nvPr/>
-        </p:nvSpPr>
-        <p:spPr>
-          <a:xfrm>
-            <a:off x="3154680" y="3566159"/>
-            <a:ext cx="8092440" cy="1188720"/>
-          </a:xfrm>
-          <a:prstGeom prst="rect">
-            <a:avLst/>
-          </a:prstGeom>
-          <a:noFill/>
-        </p:spPr>
-        <p:txBody>
-          <a:bodyPr wrap="square" lIns="0" rIns="0" tIns="0" bIns="0">
-            <a:spAutoFit/>
-          </a:bodyPr>
-          <a:lstStyle/>
-          <a:p>
-            <a:pPr algn="l">
-              <a:lnSpc>
-                <a:spcPct val="140000"/>
-              </a:lnSpc>
-              <a:spcAft>
-                <a:spcPts val="0"/>
-              </a:spcAft>
-            </a:pPr>
-            <a:r>
-              <a:rPr sz="1450" b="0">
-                <a:solidFill>
-                  <a:srgbClr val="14203A"/>
-                </a:solidFill>
-                <a:latin typeface="Segoe UI"/>
-              </a:rPr>
-              <a:t>Pages of the ANTAI file storing part of their text as images. A mandatory declaration, legible on screen, invisible to every extractor tested. So the tool refuses to call anything absent, and names the pages to open by hand.</a:t>
-            </a:r>
-          </a:p>
-        </p:txBody>
-      </p:sp>
-      <p:sp>
-        <p:nvSpPr>
-          <p:cNvPr id="8" name="TextBox 7"/>
-          <p:cNvSpPr txBox="1"/>
-          <p:nvPr/>
-        </p:nvSpPr>
-        <p:spPr>
-          <a:xfrm>
-            <a:off x="868680" y="4937759"/>
-            <a:ext cx="2103120" cy="685800"/>
-          </a:xfrm>
-          <a:prstGeom prst="rect">
-            <a:avLst/>
-          </a:prstGeom>
-          <a:noFill/>
-        </p:spPr>
-        <p:txBody>
-          <a:bodyPr wrap="square" lIns="0" rIns="0" tIns="0" bIns="0">
-            <a:spAutoFit/>
-          </a:bodyPr>
-          <a:lstStyle/>
-          <a:p>
-            <a:pPr algn="l">
-              <a:lnSpc>
-                <a:spcPct val="115000"/>
-              </a:lnSpc>
-              <a:spcAft>
-                <a:spcPts val="0"/>
-              </a:spcAft>
-            </a:pPr>
-            <a:r>
-              <a:rPr sz="3400" b="1">
-                <a:solidFill>
-                  <a:srgbClr val="A8243B"/>
-                </a:solidFill>
-                <a:latin typeface="Segoe UI"/>
-              </a:rPr>
-              <a:t>1 of 4</a:t>
-            </a:r>
-          </a:p>
-        </p:txBody>
-      </p:sp>
-      <p:sp>
-        <p:nvSpPr>
-          <p:cNvPr id="9" name="TextBox 8"/>
-          <p:cNvSpPr txBox="1"/>
-          <p:nvPr/>
-        </p:nvSpPr>
-        <p:spPr>
-          <a:xfrm>
-            <a:off x="3154680" y="4983479"/>
-            <a:ext cx="8092440" cy="1188720"/>
-          </a:xfrm>
-          <a:prstGeom prst="rect">
-            <a:avLst/>
-          </a:prstGeom>
-          <a:noFill/>
-        </p:spPr>
-        <p:txBody>
-          <a:bodyPr wrap="square" lIns="0" rIns="0" tIns="0" bIns="0">
-            <a:spAutoFit/>
-          </a:bodyPr>
-          <a:lstStyle/>
-          <a:p>
-            <a:pPr algn="l">
-              <a:lnSpc>
-                <a:spcPct val="140000"/>
-              </a:lnSpc>
-              <a:spcAft>
-                <a:spcPts val="0"/>
-              </a:spcAft>
-            </a:pPr>
-            <a:r>
-              <a:rPr sz="1450" b="0">
-                <a:solidFill>
-                  <a:srgbClr val="14203A"/>
-                </a:solidFill>
-                <a:latin typeface="Segoe UI"/>
-              </a:rPr>
-              <a:t>Requirements in the “English” EFSA pack that are written in French. Found on the first run of a real document — which is why the language is decided per requirement, not per file.</a:t>
-            </a:r>
-          </a:p>
-        </p:txBody>
-      </p:sp>
-      <p:sp>
-        <p:nvSpPr>
-          <p:cNvPr id="10" name="TextBox 9"/>
-          <p:cNvSpPr txBox="1"/>
-          <p:nvPr/>
-        </p:nvSpPr>
-        <p:spPr>
-          <a:xfrm>
-            <a:off x="868680" y="5989320"/>
-            <a:ext cx="10454335" cy="548640"/>
-          </a:xfrm>
-          <a:prstGeom prst="rect">
-            <a:avLst/>
-          </a:prstGeom>
-          <a:noFill/>
-        </p:spPr>
-        <p:txBody>
-          <a:bodyPr wrap="square" lIns="0" rIns="0" tIns="0" bIns="0">
-            <a:spAutoFit/>
-          </a:bodyPr>
-          <a:lstStyle/>
-          <a:p>
-            <a:pPr algn="l">
-              <a:lnSpc>
-                <a:spcPct val="115000"/>
-              </a:lnSpc>
-              <a:spcAft>
-                <a:spcPts val="0"/>
-              </a:spcAft>
-            </a:pPr>
-            <a:r>
-              <a:rPr sz="1300" b="0">
-                <a:solidFill>
-                  <a:srgbClr val="5B6880"/>
-                </a:solidFill>
-                <a:latin typeface="Segoe UI"/>
-              </a:rPr>
-              <a:t>Every count moves between runs. Every quotation, and every verdict computed from it, does not.</a:t>
+              <a:t>Both agents are Strands agents, and both are given tools — page_text, quote_is_on_page, list_documents, document_is_in_library. A tool the agent never calls changes nothing: the verification runs either way.</a:t>
             </a:r>
           </a:p>
         </p:txBody>
@@ -8951,7 +8019,7 @@
         </p:nvSpPr>
         <p:spPr>
           <a:xfrm>
-            <a:off x="868680" y="566928"/>
+            <a:off x="868680" y="960120"/>
             <a:ext cx="1051560" cy="50292"/>
           </a:xfrm>
           <a:prstGeom prst="rect">
@@ -8995,8 +8063,8 @@
         </p:nvSpPr>
         <p:spPr>
           <a:xfrm>
-            <a:off x="868680" y="822960"/>
-            <a:ext cx="10454335" cy="548640"/>
+            <a:off x="868680" y="1216152"/>
+            <a:ext cx="10454335" cy="914400"/>
           </a:xfrm>
           <a:prstGeom prst="rect">
             <a:avLst/>
@@ -9018,41 +8086,183 @@
               </a:spcAft>
             </a:pPr>
             <a:r>
-              <a:rPr sz="2700" b="1">
+              <a:rPr sz="3400" b="1">
                 <a:solidFill>
                   <a:srgbClr val="14203A"/>
                 </a:solidFill>
                 <a:latin typeface="Segoe UI"/>
               </a:rPr>
-              <a:t>Nothing crosses without being checked</a:t>
-            </a:r>
-          </a:p>
-        </p:txBody>
-      </p:sp>
-      <p:pic>
-        <p:nvPicPr>
-          <p:cNvPr id="4" name="Picture 3" descr="architecture.png"/>
-          <p:cNvPicPr>
-            <a:picLocks noChangeAspect="1"/>
-          </p:cNvPicPr>
+              <a:t>Who it is for</a:t>
+            </a:r>
+          </a:p>
+        </p:txBody>
+      </p:sp>
+      <p:sp>
+        <p:nvSpPr>
+          <p:cNvPr id="4" name="TextBox 3"/>
+          <p:cNvSpPr txBox="1"/>
           <p:nvPr/>
-        </p:nvPicPr>
-        <p:blipFill>
-          <a:blip r:embed="rId2"/>
-          <a:stretch>
-            <a:fillRect/>
-          </a:stretch>
-        </p:blipFill>
-        <p:spPr>
-          <a:xfrm>
-            <a:off x="426567" y="1600200"/>
-            <a:ext cx="11338560" cy="4538381"/>
+        </p:nvSpPr>
+        <p:spPr>
+          <a:xfrm>
+            <a:off x="868680" y="2194560"/>
+            <a:ext cx="10424160" cy="2011680"/>
           </a:xfrm>
           <a:prstGeom prst="rect">
             <a:avLst/>
           </a:prstGeom>
-        </p:spPr>
-      </p:pic>
+          <a:noFill/>
+        </p:spPr>
+        <p:txBody>
+          <a:bodyPr wrap="square" lIns="0" rIns="0" tIns="0" bIns="0">
+            <a:spAutoFit/>
+          </a:bodyPr>
+          <a:lstStyle/>
+          <a:p>
+            <a:pPr algn="l">
+              <a:lnSpc>
+                <a:spcPct val="135000"/>
+              </a:lnSpc>
+              <a:spcAft>
+                <a:spcPts val="1600"/>
+              </a:spcAft>
+            </a:pPr>
+            <a:r>
+              <a:rPr sz="2100" b="0">
+                <a:solidFill>
+                  <a:srgbClr val="14203A"/>
+                </a:solidFill>
+                <a:latin typeface="Segoe UI"/>
+              </a:rPr>
+              <a:t>The person assembling the bid: a small firm without a bid office, a subcontractor, a first-time bidder.</a:t>
+            </a:r>
+          </a:p>
+          <a:p>
+            <a:pPr algn="l">
+              <a:lnSpc>
+                <a:spcPct val="145000"/>
+              </a:lnSpc>
+              <a:spcAft>
+                <a:spcPts val="0"/>
+              </a:spcAft>
+            </a:pPr>
+            <a:r>
+              <a:rPr sz="1550" b="0">
+                <a:solidFill>
+                  <a:srgbClr val="5B6880"/>
+                </a:solidFill>
+                <a:latin typeface="Segoe UI"/>
+              </a:rPr>
+              <a:t>The buyer already has this checklist. The bidder does not. Getting it wrong costs a contract that was winnable on the merits — which is why the tool would rather say “check this” than say “covered”.</a:t>
+            </a:r>
+          </a:p>
+        </p:txBody>
+      </p:sp>
+      <p:sp>
+        <p:nvSpPr>
+          <p:cNvPr id="5" name="Rectangle 4"/>
+          <p:cNvSpPr/>
+          <p:nvPr/>
+        </p:nvSpPr>
+        <p:spPr>
+          <a:xfrm>
+            <a:off x="868680" y="4480560"/>
+            <a:ext cx="41148" cy="1371600"/>
+          </a:xfrm>
+          <a:prstGeom prst="rect">
+            <a:avLst/>
+          </a:prstGeom>
+          <a:solidFill>
+            <a:srgbClr val="A8243B"/>
+          </a:solidFill>
+          <a:ln>
+            <a:noFill/>
+          </a:ln>
+          <a:effectLst/>
+        </p:spPr>
+        <p:style>
+          <a:lnRef idx="1">
+            <a:schemeClr val="accent1"/>
+          </a:lnRef>
+          <a:fillRef idx="3">
+            <a:schemeClr val="accent1"/>
+          </a:fillRef>
+          <a:effectRef idx="2">
+            <a:schemeClr val="accent1"/>
+          </a:effectRef>
+          <a:fontRef idx="minor">
+            <a:schemeClr val="lt1"/>
+          </a:fontRef>
+        </p:style>
+        <p:txBody>
+          <a:bodyPr rtlCol="0" anchor="ctr"/>
+          <a:lstStyle/>
+          <a:p>
+            <a:pPr algn="ctr"/>
+          </a:p>
+        </p:txBody>
+      </p:sp>
+      <p:sp>
+        <p:nvSpPr>
+          <p:cNvPr id="6" name="TextBox 5"/>
+          <p:cNvSpPr txBox="1"/>
+          <p:nvPr/>
+        </p:nvSpPr>
+        <p:spPr>
+          <a:xfrm>
+            <a:off x="1280160" y="4572000"/>
+            <a:ext cx="9966960" cy="1280160"/>
+          </a:xfrm>
+          <a:prstGeom prst="rect">
+            <a:avLst/>
+          </a:prstGeom>
+          <a:noFill/>
+        </p:spPr>
+        <p:txBody>
+          <a:bodyPr wrap="square" lIns="0" rIns="0" tIns="0" bIns="0">
+            <a:spAutoFit/>
+          </a:bodyPr>
+          <a:lstStyle/>
+          <a:p>
+            <a:pPr algn="l">
+              <a:lnSpc>
+                <a:spcPct val="130000"/>
+              </a:lnSpc>
+              <a:spcAft>
+                <a:spcPts val="800"/>
+              </a:spcAft>
+            </a:pPr>
+            <a:r>
+              <a:rPr sz="1900" b="1">
+                <a:solidFill>
+                  <a:srgbClr val="14203A"/>
+                </a:solidFill>
+                <a:latin typeface="Segoe UI"/>
+              </a:rPr>
+              <a:t>It does not write your bid, and it does not tell you that you are compliant.</a:t>
+            </a:r>
+          </a:p>
+          <a:p>
+            <a:pPr algn="l">
+              <a:lnSpc>
+                <a:spcPct val="130000"/>
+              </a:lnSpc>
+              <a:spcAft>
+                <a:spcPts val="0"/>
+              </a:spcAft>
+            </a:pPr>
+            <a:r>
+              <a:rPr sz="1900" b="0">
+                <a:solidFill>
+                  <a:srgbClr val="14203A"/>
+                </a:solidFill>
+                <a:latin typeface="Segoe UI"/>
+              </a:rPr>
+              <a:t>It finds the gaps and shows you where to look.</a:t>
+            </a:r>
+          </a:p>
+        </p:txBody>
+      </p:sp>
     </p:spTree>
   </p:cSld>
   <p:clrMapOvr>
